--- a/public/lessons/year-6-maths/summer/week-26/reason-from-shape-properties/teaching-powerpoint-v1.pptx
+++ b/public/lessons/year-6-maths/summer/week-26/reason-from-shape-properties/teaching-powerpoint-v1.pptx
@@ -2,24 +2,24 @@
 <file path=ppt/presentation.xml><?xml version="1.0" encoding="utf-8"?>
 <p:presentation xmlns:p="http://schemas.openxmlformats.org/presentationml/2006/main">
   <p:sldMasterIdLst>
-    <p:sldMasterId xmlns:r="http://schemas.openxmlformats.org/officeDocument/2006/relationships" id="2147483648" r:id="R449bdc07f444466c"/>
+    <p:sldMasterId xmlns:r="http://schemas.openxmlformats.org/officeDocument/2006/relationships" id="2147483648" r:id="Rf33ba6d6f4284281"/>
   </p:sldMasterIdLst>
   <p:notesMasterIdLst>
-    <p:notesMasterId xmlns:r="http://schemas.openxmlformats.org/officeDocument/2006/relationships" r:id="R4996776842ac422e"/>
+    <p:notesMasterId xmlns:r="http://schemas.openxmlformats.org/officeDocument/2006/relationships" r:id="Rfa7577a451d54aed"/>
   </p:notesMasterIdLst>
   <p:sldIdLst>
-    <p:sldId xmlns:r="http://schemas.openxmlformats.org/officeDocument/2006/relationships" id="256" r:id="Rc50394ce70554121"/>
-    <p:sldId xmlns:r="http://schemas.openxmlformats.org/officeDocument/2006/relationships" id="257" r:id="R73e90da6d60a4040"/>
-    <p:sldId xmlns:r="http://schemas.openxmlformats.org/officeDocument/2006/relationships" id="258" r:id="Rc8e2c42cd99341bb"/>
-    <p:sldId xmlns:r="http://schemas.openxmlformats.org/officeDocument/2006/relationships" id="259" r:id="R2ed7b63fd9164211"/>
-    <p:sldId xmlns:r="http://schemas.openxmlformats.org/officeDocument/2006/relationships" id="260" r:id="Rc531dffe162d4361"/>
-    <p:sldId xmlns:r="http://schemas.openxmlformats.org/officeDocument/2006/relationships" id="261" r:id="Rcbe7f7c7e0e64e18"/>
-    <p:sldId xmlns:r="http://schemas.openxmlformats.org/officeDocument/2006/relationships" id="262" r:id="R8d45133830c849b6"/>
-    <p:sldId xmlns:r="http://schemas.openxmlformats.org/officeDocument/2006/relationships" id="263" r:id="R6f820e56798d49eb"/>
-    <p:sldId xmlns:r="http://schemas.openxmlformats.org/officeDocument/2006/relationships" id="264" r:id="Rb992923957174321"/>
-    <p:sldId xmlns:r="http://schemas.openxmlformats.org/officeDocument/2006/relationships" id="265" r:id="R074d913dafc64d59"/>
-    <p:sldId xmlns:r="http://schemas.openxmlformats.org/officeDocument/2006/relationships" id="266" r:id="R5d589d61dde04b61"/>
-    <p:sldId xmlns:r="http://schemas.openxmlformats.org/officeDocument/2006/relationships" id="267" r:id="Rb6f6f2bd949b4c28"/>
+    <p:sldId xmlns:r="http://schemas.openxmlformats.org/officeDocument/2006/relationships" id="256" r:id="Raa7440abc4f043cc"/>
+    <p:sldId xmlns:r="http://schemas.openxmlformats.org/officeDocument/2006/relationships" id="257" r:id="R7b11047799704a45"/>
+    <p:sldId xmlns:r="http://schemas.openxmlformats.org/officeDocument/2006/relationships" id="258" r:id="Re7bd5258e5394056"/>
+    <p:sldId xmlns:r="http://schemas.openxmlformats.org/officeDocument/2006/relationships" id="259" r:id="R69b710ba054f4d91"/>
+    <p:sldId xmlns:r="http://schemas.openxmlformats.org/officeDocument/2006/relationships" id="260" r:id="R9a710a541a684a66"/>
+    <p:sldId xmlns:r="http://schemas.openxmlformats.org/officeDocument/2006/relationships" id="261" r:id="R62b02d446c744c96"/>
+    <p:sldId xmlns:r="http://schemas.openxmlformats.org/officeDocument/2006/relationships" id="262" r:id="R2bd4a51a8a594a18"/>
+    <p:sldId xmlns:r="http://schemas.openxmlformats.org/officeDocument/2006/relationships" id="263" r:id="Rc2038fca2ef44716"/>
+    <p:sldId xmlns:r="http://schemas.openxmlformats.org/officeDocument/2006/relationships" id="264" r:id="R30f668906e964ce1"/>
+    <p:sldId xmlns:r="http://schemas.openxmlformats.org/officeDocument/2006/relationships" id="265" r:id="Rf308bafada9940ad"/>
+    <p:sldId xmlns:r="http://schemas.openxmlformats.org/officeDocument/2006/relationships" id="266" r:id="Re2736d8faf894c5b"/>
+    <p:sldId xmlns:r="http://schemas.openxmlformats.org/officeDocument/2006/relationships" id="267" r:id="R9388692bfb274d6c"/>
   </p:sldIdLst>
   <p:sldSz cx="12192000" cy="6858000"/>
   <p:notesSz cx="6858000" cy="9144000"/>
@@ -873,7 +873,7 @@
           <a:lstStyle xmlns:a="http://schemas.openxmlformats.org/drawingml/2006/main"/>
           <a:p xmlns:a="http://schemas.openxmlformats.org/drawingml/2006/main">
             <a:r>
-              <a:t>I do. Reveal the question, setup and each calculation stage one click at a time. Pupils watch before copying. Model answer: 75 degrees.</a:t>
+              <a:t>I do. Reveal the question, then reveal each mathematical change one click at a time. Point to the numbers and operation that changed before moving to the next line. Final answer: 75 degrees.</a:t>
             </a:r>
           </a:p>
         </p:txBody>
@@ -1291,7 +1291,7 @@
   </p:cSld>
   <p:clrMap bg1="lt1" tx1="dk1" bg2="lt2" tx2="dk2" accent1="accent1" accent2="accent2" accent3="accent3" accent4="accent4" accent5="accent5" accent6="accent6" hlink="hlink" folHlink="folHlink"/>
   <p:sldLayoutIdLst>
-    <p:sldLayoutId xmlns:r="http://schemas.openxmlformats.org/officeDocument/2006/relationships" id="2147483649" r:id="R344b312ce0cf4e9f"/>
+    <p:sldLayoutId xmlns:r="http://schemas.openxmlformats.org/officeDocument/2006/relationships" id="2147483649" r:id="Ra48509cd30864417"/>
   </p:sldLayoutIdLst>
   <p:txStyles>
     <p:titleStyle>
@@ -1842,7 +1842,7 @@
           <p:cNvPr id="12" name="">
             <a:extLst xmlns:a="http://schemas.openxmlformats.org/drawingml/2006/main">
               <a:ext uri="{FF2B5EF4-FFF2-40B4-BE49-F238E27FC236}">
-                <a16:creationId xmlns:a16="http://schemas.microsoft.com/office/drawing/2014/main" id="{F90A3113-77B7-4054-BAD2-179A5EDA24FA}"/>
+                <a16:creationId xmlns:a16="http://schemas.microsoft.com/office/drawing/2014/main" id="{6D9BE922-CB25-4A20-A1FC-021CC5FC97F6}"/>
               </a:ext>
             </a:extLst>
           </p:cNvPr>
@@ -1874,7 +1874,7 @@
           <p:cNvPr id="2" name="">
             <a:extLst xmlns:a="http://schemas.openxmlformats.org/drawingml/2006/main">
               <a:ext uri="{FF2B5EF4-FFF2-40B4-BE49-F238E27FC236}">
-                <a16:creationId xmlns:a16="http://schemas.microsoft.com/office/drawing/2014/main" id="{93212C84-F6BD-4C5D-9288-B0C814E283FE}"/>
+                <a16:creationId xmlns:a16="http://schemas.microsoft.com/office/drawing/2014/main" id="{3A11AF8E-C9B6-43DE-847B-544DB4AE83D0}"/>
               </a:ext>
             </a:extLst>
           </p:cNvPr>
@@ -1931,7 +1931,7 @@
           <p:cNvPr id="3" name="">
             <a:extLst xmlns:a="http://schemas.openxmlformats.org/drawingml/2006/main">
               <a:ext uri="{FF2B5EF4-FFF2-40B4-BE49-F238E27FC236}">
-                <a16:creationId xmlns:a16="http://schemas.microsoft.com/office/drawing/2014/main" id="{CDE26D57-C0FE-453C-A72F-151233680A3A}"/>
+                <a16:creationId xmlns:a16="http://schemas.microsoft.com/office/drawing/2014/main" id="{525AD5FC-0C5D-4A5A-A517-EA7853B82E55}"/>
               </a:ext>
             </a:extLst>
           </p:cNvPr>
@@ -1965,7 +1965,7 @@
           <p:cNvPr id="4" name="">
             <a:extLst xmlns:a="http://schemas.openxmlformats.org/drawingml/2006/main">
               <a:ext uri="{FF2B5EF4-FFF2-40B4-BE49-F238E27FC236}">
-                <a16:creationId xmlns:a16="http://schemas.microsoft.com/office/drawing/2014/main" id="{0845AD82-C058-4F38-A509-8F3812F9D240}"/>
+                <a16:creationId xmlns:a16="http://schemas.microsoft.com/office/drawing/2014/main" id="{1F40694A-4C6F-4930-806F-71074D8A298D}"/>
               </a:ext>
             </a:extLst>
           </p:cNvPr>
@@ -2022,7 +2022,7 @@
           <p:cNvPr id="5" name="">
             <a:extLst xmlns:a="http://schemas.openxmlformats.org/drawingml/2006/main">
               <a:ext uri="{FF2B5EF4-FFF2-40B4-BE49-F238E27FC236}">
-                <a16:creationId xmlns:a16="http://schemas.microsoft.com/office/drawing/2014/main" id="{E4364EBA-62A0-4719-9D2B-8B6438FB8351}"/>
+                <a16:creationId xmlns:a16="http://schemas.microsoft.com/office/drawing/2014/main" id="{52F5468E-8FDD-4FE6-96A1-98CC6596D18D}"/>
               </a:ext>
             </a:extLst>
           </p:cNvPr>
@@ -2079,7 +2079,7 @@
           <p:cNvPr id="6" name="">
             <a:extLst xmlns:a="http://schemas.openxmlformats.org/drawingml/2006/main">
               <a:ext uri="{FF2B5EF4-FFF2-40B4-BE49-F238E27FC236}">
-                <a16:creationId xmlns:a16="http://schemas.microsoft.com/office/drawing/2014/main" id="{A7CDB728-9978-4AED-80F6-9DC491F1E937}"/>
+                <a16:creationId xmlns:a16="http://schemas.microsoft.com/office/drawing/2014/main" id="{35CFED24-02E7-4BAE-AA31-E8DDC2822977}"/>
               </a:ext>
             </a:extLst>
           </p:cNvPr>
@@ -2113,7 +2113,7 @@
           <p:cNvPr id="7" name="">
             <a:extLst xmlns:a="http://schemas.openxmlformats.org/drawingml/2006/main">
               <a:ext uri="{FF2B5EF4-FFF2-40B4-BE49-F238E27FC236}">
-                <a16:creationId xmlns:a16="http://schemas.microsoft.com/office/drawing/2014/main" id="{83955407-34DB-434D-BA42-E69B60404990}"/>
+                <a16:creationId xmlns:a16="http://schemas.microsoft.com/office/drawing/2014/main" id="{9EF8D5D5-B777-428D-B362-3380468A72C3}"/>
               </a:ext>
             </a:extLst>
           </p:cNvPr>
@@ -2170,7 +2170,7 @@
           <p:cNvPr id="8" name="">
             <a:extLst xmlns:a="http://schemas.openxmlformats.org/drawingml/2006/main">
               <a:ext uri="{FF2B5EF4-FFF2-40B4-BE49-F238E27FC236}">
-                <a16:creationId xmlns:a16="http://schemas.microsoft.com/office/drawing/2014/main" id="{23056069-FD71-4ACD-9A32-081A3ED0A2DE}"/>
+                <a16:creationId xmlns:a16="http://schemas.microsoft.com/office/drawing/2014/main" id="{CCA1483F-9E82-4793-AE17-7B6BABE80B91}"/>
               </a:ext>
             </a:extLst>
           </p:cNvPr>
@@ -2227,7 +2227,7 @@
           <p:cNvPr id="9" name="">
             <a:extLst xmlns:a="http://schemas.openxmlformats.org/drawingml/2006/main">
               <a:ext uri="{FF2B5EF4-FFF2-40B4-BE49-F238E27FC236}">
-                <a16:creationId xmlns:a16="http://schemas.microsoft.com/office/drawing/2014/main" id="{C3358704-97A8-4BC4-B4E3-E6FDA931E755}"/>
+                <a16:creationId xmlns:a16="http://schemas.microsoft.com/office/drawing/2014/main" id="{C16E6947-BA5B-4046-8040-2854DBE61093}"/>
               </a:ext>
             </a:extLst>
           </p:cNvPr>
@@ -2284,7 +2284,7 @@
           <p:cNvPr id="10" name="">
             <a:extLst xmlns:a="http://schemas.openxmlformats.org/drawingml/2006/main">
               <a:ext uri="{FF2B5EF4-FFF2-40B4-BE49-F238E27FC236}">
-                <a16:creationId xmlns:a16="http://schemas.microsoft.com/office/drawing/2014/main" id="{F336B77D-7660-47D2-B904-F989AC244B8F}"/>
+                <a16:creationId xmlns:a16="http://schemas.microsoft.com/office/drawing/2014/main" id="{EB1DF201-70A7-47F1-8633-49ACAAC94E2D}"/>
               </a:ext>
             </a:extLst>
           </p:cNvPr>
@@ -2341,7 +2341,7 @@
           <p:cNvPr id="11" name="">
             <a:extLst xmlns:a="http://schemas.openxmlformats.org/drawingml/2006/main">
               <a:ext uri="{FF2B5EF4-FFF2-40B4-BE49-F238E27FC236}">
-                <a16:creationId xmlns:a16="http://schemas.microsoft.com/office/drawing/2014/main" id="{417C6D01-E5FE-49A6-8336-20B4FCF80D03}"/>
+                <a16:creationId xmlns:a16="http://schemas.microsoft.com/office/drawing/2014/main" id="{199204AB-4943-45BF-B103-DC0D3D21A695}"/>
               </a:ext>
             </a:extLst>
           </p:cNvPr>
@@ -2396,7 +2396,7 @@
     </p:spTree>
     <p:extLst>
       <p:ext uri="{BB962C8B-B14F-4D97-AF65-F5344CB8AC3E}">
-        <p14:creationId xmlns:p14="http://schemas.microsoft.com/office/powerpoint/2010/main" val="1389607182"/>
+        <p14:creationId xmlns:p14="http://schemas.microsoft.com/office/powerpoint/2010/main" val="1886799627"/>
       </p:ext>
     </p:extLst>
   </p:cSld>
@@ -2427,7 +2427,7 @@
           <p:cNvPr id="14" name="">
             <a:extLst xmlns:a="http://schemas.openxmlformats.org/drawingml/2006/main">
               <a:ext uri="{FF2B5EF4-FFF2-40B4-BE49-F238E27FC236}">
-                <a16:creationId xmlns:a16="http://schemas.microsoft.com/office/drawing/2014/main" id="{60E62E42-8AB0-495B-9049-CACA3CB120E4}"/>
+                <a16:creationId xmlns:a16="http://schemas.microsoft.com/office/drawing/2014/main" id="{2F2E7242-6F6A-4EC0-9B6A-DB52CBCC60C1}"/>
               </a:ext>
             </a:extLst>
           </p:cNvPr>
@@ -2459,7 +2459,7 @@
           <p:cNvPr id="2" name="">
             <a:extLst xmlns:a="http://schemas.openxmlformats.org/drawingml/2006/main">
               <a:ext uri="{FF2B5EF4-FFF2-40B4-BE49-F238E27FC236}">
-                <a16:creationId xmlns:a16="http://schemas.microsoft.com/office/drawing/2014/main" id="{BDC5CBE4-FD53-4CEA-9010-CEEA83D6D0A3}"/>
+                <a16:creationId xmlns:a16="http://schemas.microsoft.com/office/drawing/2014/main" id="{B4FE0E40-3A6E-4F9B-BF98-EA973415AC3E}"/>
               </a:ext>
             </a:extLst>
           </p:cNvPr>
@@ -2516,7 +2516,7 @@
           <p:cNvPr id="3" name="">
             <a:extLst xmlns:a="http://schemas.openxmlformats.org/drawingml/2006/main">
               <a:ext uri="{FF2B5EF4-FFF2-40B4-BE49-F238E27FC236}">
-                <a16:creationId xmlns:a16="http://schemas.microsoft.com/office/drawing/2014/main" id="{2D01C316-9CA3-4BE6-8FA3-253AC9BA3555}"/>
+                <a16:creationId xmlns:a16="http://schemas.microsoft.com/office/drawing/2014/main" id="{74BDA38F-C367-470E-83DC-ABDC151531A4}"/>
               </a:ext>
             </a:extLst>
           </p:cNvPr>
@@ -2548,7 +2548,7 @@
           <p:cNvPr id="4" name="">
             <a:extLst xmlns:a="http://schemas.openxmlformats.org/drawingml/2006/main">
               <a:ext uri="{FF2B5EF4-FFF2-40B4-BE49-F238E27FC236}">
-                <a16:creationId xmlns:a16="http://schemas.microsoft.com/office/drawing/2014/main" id="{FA24067E-8CC8-4E3E-96C0-83F9EE731F36}"/>
+                <a16:creationId xmlns:a16="http://schemas.microsoft.com/office/drawing/2014/main" id="{F58D96C1-4F24-4BC1-9E8F-3FEA0E5A5680}"/>
               </a:ext>
             </a:extLst>
           </p:cNvPr>
@@ -2605,7 +2605,7 @@
           <p:cNvPr id="5" name="">
             <a:extLst xmlns:a="http://schemas.openxmlformats.org/drawingml/2006/main">
               <a:ext uri="{FF2B5EF4-FFF2-40B4-BE49-F238E27FC236}">
-                <a16:creationId xmlns:a16="http://schemas.microsoft.com/office/drawing/2014/main" id="{F5304AB9-72AF-4169-BF48-B2884100EBD7}"/>
+                <a16:creationId xmlns:a16="http://schemas.microsoft.com/office/drawing/2014/main" id="{F1920244-A6F1-449A-AE0A-CF8357EF8579}"/>
               </a:ext>
             </a:extLst>
           </p:cNvPr>
@@ -2662,7 +2662,7 @@
           <p:cNvPr id="6" name="">
             <a:extLst xmlns:a="http://schemas.openxmlformats.org/drawingml/2006/main">
               <a:ext uri="{FF2B5EF4-FFF2-40B4-BE49-F238E27FC236}">
-                <a16:creationId xmlns:a16="http://schemas.microsoft.com/office/drawing/2014/main" id="{78308720-11EF-4808-A47F-D38A7027A13F}"/>
+                <a16:creationId xmlns:a16="http://schemas.microsoft.com/office/drawing/2014/main" id="{36AE96A1-7803-48E1-8084-B1A8DE21D033}"/>
               </a:ext>
             </a:extLst>
           </p:cNvPr>
@@ -2719,7 +2719,7 @@
           <p:cNvPr id="7" name="">
             <a:extLst xmlns:a="http://schemas.openxmlformats.org/drawingml/2006/main">
               <a:ext uri="{FF2B5EF4-FFF2-40B4-BE49-F238E27FC236}">
-                <a16:creationId xmlns:a16="http://schemas.microsoft.com/office/drawing/2014/main" id="{B2257AF9-B672-41A7-B282-FA9AA2F4C479}"/>
+                <a16:creationId xmlns:a16="http://schemas.microsoft.com/office/drawing/2014/main" id="{EA0DB59E-47C6-4FF2-BEA1-61FB67E62778}"/>
               </a:ext>
             </a:extLst>
           </p:cNvPr>
@@ -2751,7 +2751,7 @@
           <p:cNvPr id="8" name="">
             <a:extLst xmlns:a="http://schemas.openxmlformats.org/drawingml/2006/main">
               <a:ext uri="{FF2B5EF4-FFF2-40B4-BE49-F238E27FC236}">
-                <a16:creationId xmlns:a16="http://schemas.microsoft.com/office/drawing/2014/main" id="{DED84809-B977-4F2F-89FB-29C8A90658AD}"/>
+                <a16:creationId xmlns:a16="http://schemas.microsoft.com/office/drawing/2014/main" id="{EDF328C2-6C0E-4169-B953-8DA20F9E8256}"/>
               </a:ext>
             </a:extLst>
           </p:cNvPr>
@@ -2808,7 +2808,7 @@
           <p:cNvPr id="9" name="">
             <a:extLst xmlns:a="http://schemas.openxmlformats.org/drawingml/2006/main">
               <a:ext uri="{FF2B5EF4-FFF2-40B4-BE49-F238E27FC236}">
-                <a16:creationId xmlns:a16="http://schemas.microsoft.com/office/drawing/2014/main" id="{5193586E-888D-484A-92ED-91F080F407EB}"/>
+                <a16:creationId xmlns:a16="http://schemas.microsoft.com/office/drawing/2014/main" id="{569D8C57-D32F-4C91-9534-C30CF8965BD6}"/>
               </a:ext>
             </a:extLst>
           </p:cNvPr>
@@ -2865,7 +2865,7 @@
           <p:cNvPr id="10" name="">
             <a:extLst xmlns:a="http://schemas.openxmlformats.org/drawingml/2006/main">
               <a:ext uri="{FF2B5EF4-FFF2-40B4-BE49-F238E27FC236}">
-                <a16:creationId xmlns:a16="http://schemas.microsoft.com/office/drawing/2014/main" id="{D12FEAE9-C8D6-43B7-A273-53BD9D7A7ECA}"/>
+                <a16:creationId xmlns:a16="http://schemas.microsoft.com/office/drawing/2014/main" id="{48DD1332-A6B1-484F-8A9D-C2C7A9107854}"/>
               </a:ext>
             </a:extLst>
           </p:cNvPr>
@@ -2922,7 +2922,7 @@
           <p:cNvPr id="11" name="">
             <a:extLst xmlns:a="http://schemas.openxmlformats.org/drawingml/2006/main">
               <a:ext uri="{FF2B5EF4-FFF2-40B4-BE49-F238E27FC236}">
-                <a16:creationId xmlns:a16="http://schemas.microsoft.com/office/drawing/2014/main" id="{704640F9-84AE-4836-B490-317E27A61614}"/>
+                <a16:creationId xmlns:a16="http://schemas.microsoft.com/office/drawing/2014/main" id="{64DF7763-B689-4633-9F04-B493EADFF78A}"/>
               </a:ext>
             </a:extLst>
           </p:cNvPr>
@@ -2979,7 +2979,7 @@
           <p:cNvPr id="12" name="">
             <a:extLst xmlns:a="http://schemas.openxmlformats.org/drawingml/2006/main">
               <a:ext uri="{FF2B5EF4-FFF2-40B4-BE49-F238E27FC236}">
-                <a16:creationId xmlns:a16="http://schemas.microsoft.com/office/drawing/2014/main" id="{B2C840A9-1152-44D0-8C77-6E3883C7D70A}"/>
+                <a16:creationId xmlns:a16="http://schemas.microsoft.com/office/drawing/2014/main" id="{71338E65-285E-4131-B47F-FAA487F33827}"/>
               </a:ext>
             </a:extLst>
           </p:cNvPr>
@@ -3036,7 +3036,7 @@
           <p:cNvPr id="13" name="">
             <a:extLst xmlns:a="http://schemas.openxmlformats.org/drawingml/2006/main">
               <a:ext uri="{FF2B5EF4-FFF2-40B4-BE49-F238E27FC236}">
-                <a16:creationId xmlns:a16="http://schemas.microsoft.com/office/drawing/2014/main" id="{405AC48A-C32A-4A2E-80E5-B6B92CB11B03}"/>
+                <a16:creationId xmlns:a16="http://schemas.microsoft.com/office/drawing/2014/main" id="{13F3CB83-49B1-4587-99CE-094FC1681A21}"/>
               </a:ext>
             </a:extLst>
           </p:cNvPr>
@@ -3091,7 +3091,7 @@
     </p:spTree>
     <p:extLst>
       <p:ext uri="{BB962C8B-B14F-4D97-AF65-F5344CB8AC3E}">
-        <p14:creationId xmlns:p14="http://schemas.microsoft.com/office/powerpoint/2010/main" val="1047154492"/>
+        <p14:creationId xmlns:p14="http://schemas.microsoft.com/office/powerpoint/2010/main" val="1571797936"/>
       </p:ext>
     </p:extLst>
   </p:cSld>
@@ -3292,7 +3292,7 @@
           <p:cNvPr id="19" name="">
             <a:extLst xmlns:a="http://schemas.openxmlformats.org/drawingml/2006/main">
               <a:ext uri="{FF2B5EF4-FFF2-40B4-BE49-F238E27FC236}">
-                <a16:creationId xmlns:a16="http://schemas.microsoft.com/office/drawing/2014/main" id="{91E642E2-27E9-4371-AED2-C7E8C2CF27ED}"/>
+                <a16:creationId xmlns:a16="http://schemas.microsoft.com/office/drawing/2014/main" id="{33A16432-DD2B-4872-BFA9-7A17611FA4D9}"/>
               </a:ext>
             </a:extLst>
           </p:cNvPr>
@@ -3324,7 +3324,7 @@
           <p:cNvPr id="2" name="">
             <a:extLst xmlns:a="http://schemas.openxmlformats.org/drawingml/2006/main">
               <a:ext uri="{FF2B5EF4-FFF2-40B4-BE49-F238E27FC236}">
-                <a16:creationId xmlns:a16="http://schemas.microsoft.com/office/drawing/2014/main" id="{099EDEED-3F60-4C18-AB46-BB46531B830F}"/>
+                <a16:creationId xmlns:a16="http://schemas.microsoft.com/office/drawing/2014/main" id="{5A4E8426-B140-4071-B3D1-ADD5E46E7BF2}"/>
               </a:ext>
             </a:extLst>
           </p:cNvPr>
@@ -3381,7 +3381,7 @@
           <p:cNvPr id="3" name="">
             <a:extLst xmlns:a="http://schemas.openxmlformats.org/drawingml/2006/main">
               <a:ext uri="{FF2B5EF4-FFF2-40B4-BE49-F238E27FC236}">
-                <a16:creationId xmlns:a16="http://schemas.microsoft.com/office/drawing/2014/main" id="{B64A9B0F-7F91-4AC8-BE18-CEA27C9AFF9D}"/>
+                <a16:creationId xmlns:a16="http://schemas.microsoft.com/office/drawing/2014/main" id="{829CF306-9B19-4102-ABB9-76CA402C9632}"/>
               </a:ext>
             </a:extLst>
           </p:cNvPr>
@@ -3413,7 +3413,7 @@
           <p:cNvPr id="4" name="">
             <a:extLst xmlns:a="http://schemas.openxmlformats.org/drawingml/2006/main">
               <a:ext uri="{FF2B5EF4-FFF2-40B4-BE49-F238E27FC236}">
-                <a16:creationId xmlns:a16="http://schemas.microsoft.com/office/drawing/2014/main" id="{3B1E9B59-CA02-4482-AC72-29F64FD26E63}"/>
+                <a16:creationId xmlns:a16="http://schemas.microsoft.com/office/drawing/2014/main" id="{2424D79C-F31A-4A1D-9BAC-B00822EB8835}"/>
               </a:ext>
             </a:extLst>
           </p:cNvPr>
@@ -3470,7 +3470,7 @@
           <p:cNvPr id="5" name="">
             <a:extLst xmlns:a="http://schemas.openxmlformats.org/drawingml/2006/main">
               <a:ext uri="{FF2B5EF4-FFF2-40B4-BE49-F238E27FC236}">
-                <a16:creationId xmlns:a16="http://schemas.microsoft.com/office/drawing/2014/main" id="{C6EBBC15-2042-4EB3-840A-9A8F8B07BD85}"/>
+                <a16:creationId xmlns:a16="http://schemas.microsoft.com/office/drawing/2014/main" id="{69713CC5-DA90-4C7D-8B40-785C542CFF5D}"/>
               </a:ext>
             </a:extLst>
           </p:cNvPr>
@@ -3527,7 +3527,7 @@
           <p:cNvPr id="6" name="">
             <a:extLst xmlns:a="http://schemas.openxmlformats.org/drawingml/2006/main">
               <a:ext uri="{FF2B5EF4-FFF2-40B4-BE49-F238E27FC236}">
-                <a16:creationId xmlns:a16="http://schemas.microsoft.com/office/drawing/2014/main" id="{6BEF329C-0D58-45AE-849D-1C13E47C6C65}"/>
+                <a16:creationId xmlns:a16="http://schemas.microsoft.com/office/drawing/2014/main" id="{95C924B2-D40C-41C7-A29D-EB7292B16279}"/>
               </a:ext>
             </a:extLst>
           </p:cNvPr>
@@ -3584,7 +3584,7 @@
           <p:cNvPr id="7" name="">
             <a:extLst xmlns:a="http://schemas.openxmlformats.org/drawingml/2006/main">
               <a:ext uri="{FF2B5EF4-FFF2-40B4-BE49-F238E27FC236}">
-                <a16:creationId xmlns:a16="http://schemas.microsoft.com/office/drawing/2014/main" id="{32EFA253-3205-4A36-BE13-087BD79F5DBE}"/>
+                <a16:creationId xmlns:a16="http://schemas.microsoft.com/office/drawing/2014/main" id="{982CCECF-F5B1-4CF5-B8F1-48EE434825D5}"/>
               </a:ext>
             </a:extLst>
           </p:cNvPr>
@@ -3616,7 +3616,7 @@
           <p:cNvPr id="8" name="">
             <a:extLst xmlns:a="http://schemas.openxmlformats.org/drawingml/2006/main">
               <a:ext uri="{FF2B5EF4-FFF2-40B4-BE49-F238E27FC236}">
-                <a16:creationId xmlns:a16="http://schemas.microsoft.com/office/drawing/2014/main" id="{14E5530A-067D-43C5-A0D6-90865A7E5D23}"/>
+                <a16:creationId xmlns:a16="http://schemas.microsoft.com/office/drawing/2014/main" id="{F41AC779-4EEE-462A-B68E-3EB3EDDDCCC3}"/>
               </a:ext>
             </a:extLst>
           </p:cNvPr>
@@ -3673,7 +3673,7 @@
           <p:cNvPr id="9" name="">
             <a:extLst xmlns:a="http://schemas.openxmlformats.org/drawingml/2006/main">
               <a:ext uri="{FF2B5EF4-FFF2-40B4-BE49-F238E27FC236}">
-                <a16:creationId xmlns:a16="http://schemas.microsoft.com/office/drawing/2014/main" id="{F96CA254-F820-4D05-9E08-4803276CF03A}"/>
+                <a16:creationId xmlns:a16="http://schemas.microsoft.com/office/drawing/2014/main" id="{327913ED-EAE1-43AA-A210-B67706443A5C}"/>
               </a:ext>
             </a:extLst>
           </p:cNvPr>
@@ -3730,7 +3730,7 @@
           <p:cNvPr id="10" name="">
             <a:extLst xmlns:a="http://schemas.openxmlformats.org/drawingml/2006/main">
               <a:ext uri="{FF2B5EF4-FFF2-40B4-BE49-F238E27FC236}">
-                <a16:creationId xmlns:a16="http://schemas.microsoft.com/office/drawing/2014/main" id="{285B9788-8F22-45CD-9C9B-33FDDFED01B9}"/>
+                <a16:creationId xmlns:a16="http://schemas.microsoft.com/office/drawing/2014/main" id="{B3191916-378A-48B5-B61A-C1B66549C798}"/>
               </a:ext>
             </a:extLst>
           </p:cNvPr>
@@ -3787,7 +3787,7 @@
           <p:cNvPr id="11" name="">
             <a:extLst xmlns:a="http://schemas.openxmlformats.org/drawingml/2006/main">
               <a:ext uri="{FF2B5EF4-FFF2-40B4-BE49-F238E27FC236}">
-                <a16:creationId xmlns:a16="http://schemas.microsoft.com/office/drawing/2014/main" id="{5A889207-DC68-4544-916E-D3A4322B7EDB}"/>
+                <a16:creationId xmlns:a16="http://schemas.microsoft.com/office/drawing/2014/main" id="{67521ED3-6138-43EC-9674-BAF86589B183}"/>
               </a:ext>
             </a:extLst>
           </p:cNvPr>
@@ -3821,7 +3821,7 @@
           <p:cNvPr id="12" name="">
             <a:extLst xmlns:a="http://schemas.openxmlformats.org/drawingml/2006/main">
               <a:ext uri="{FF2B5EF4-FFF2-40B4-BE49-F238E27FC236}">
-                <a16:creationId xmlns:a16="http://schemas.microsoft.com/office/drawing/2014/main" id="{6608CBC1-E1F7-4F96-A906-8018AB98AABF}"/>
+                <a16:creationId xmlns:a16="http://schemas.microsoft.com/office/drawing/2014/main" id="{FFA2EAB0-3C4F-4BD5-BC04-F06BFAE1D292}"/>
               </a:ext>
             </a:extLst>
           </p:cNvPr>
@@ -3878,7 +3878,7 @@
           <p:cNvPr id="13" name="">
             <a:extLst xmlns:a="http://schemas.openxmlformats.org/drawingml/2006/main">
               <a:ext uri="{FF2B5EF4-FFF2-40B4-BE49-F238E27FC236}">
-                <a16:creationId xmlns:a16="http://schemas.microsoft.com/office/drawing/2014/main" id="{40F73C1D-E945-4717-85CC-F2887EF2AE96}"/>
+                <a16:creationId xmlns:a16="http://schemas.microsoft.com/office/drawing/2014/main" id="{37DC91B5-7741-42C5-9EF2-CA2444F8CCD4}"/>
               </a:ext>
             </a:extLst>
           </p:cNvPr>
@@ -3935,7 +3935,7 @@
           <p:cNvPr id="14" name="">
             <a:extLst xmlns:a="http://schemas.openxmlformats.org/drawingml/2006/main">
               <a:ext uri="{FF2B5EF4-FFF2-40B4-BE49-F238E27FC236}">
-                <a16:creationId xmlns:a16="http://schemas.microsoft.com/office/drawing/2014/main" id="{95A2CB00-25C4-4707-B83D-F424FF650D01}"/>
+                <a16:creationId xmlns:a16="http://schemas.microsoft.com/office/drawing/2014/main" id="{05374BBA-80CD-4EAF-8FF4-90A325E68071}"/>
               </a:ext>
             </a:extLst>
           </p:cNvPr>
@@ -3992,7 +3992,7 @@
           <p:cNvPr id="15" name="">
             <a:extLst xmlns:a="http://schemas.openxmlformats.org/drawingml/2006/main">
               <a:ext uri="{FF2B5EF4-FFF2-40B4-BE49-F238E27FC236}">
-                <a16:creationId xmlns:a16="http://schemas.microsoft.com/office/drawing/2014/main" id="{4D2CF2AE-CD4C-48B7-ACF0-02C88ED557BC}"/>
+                <a16:creationId xmlns:a16="http://schemas.microsoft.com/office/drawing/2014/main" id="{69036FC8-A847-45B4-A345-4C5AF6AF65C0}"/>
               </a:ext>
             </a:extLst>
           </p:cNvPr>
@@ -4026,7 +4026,7 @@
           <p:cNvPr id="16" name="">
             <a:extLst xmlns:a="http://schemas.openxmlformats.org/drawingml/2006/main">
               <a:ext uri="{FF2B5EF4-FFF2-40B4-BE49-F238E27FC236}">
-                <a16:creationId xmlns:a16="http://schemas.microsoft.com/office/drawing/2014/main" id="{CCE69584-33C5-42FA-BF49-E8C90D3672F4}"/>
+                <a16:creationId xmlns:a16="http://schemas.microsoft.com/office/drawing/2014/main" id="{AEFA1E25-614F-4D2A-AB75-79386F7B2CAC}"/>
               </a:ext>
             </a:extLst>
           </p:cNvPr>
@@ -4083,7 +4083,7 @@
           <p:cNvPr id="17" name="">
             <a:extLst xmlns:a="http://schemas.openxmlformats.org/drawingml/2006/main">
               <a:ext uri="{FF2B5EF4-FFF2-40B4-BE49-F238E27FC236}">
-                <a16:creationId xmlns:a16="http://schemas.microsoft.com/office/drawing/2014/main" id="{2520D7AC-0794-4598-BC84-CA7073F233D4}"/>
+                <a16:creationId xmlns:a16="http://schemas.microsoft.com/office/drawing/2014/main" id="{EC7287B9-77EF-4E93-9CF4-52DC4AC69425}"/>
               </a:ext>
             </a:extLst>
           </p:cNvPr>
@@ -4140,7 +4140,7 @@
           <p:cNvPr id="18" name="">
             <a:extLst xmlns:a="http://schemas.openxmlformats.org/drawingml/2006/main">
               <a:ext uri="{FF2B5EF4-FFF2-40B4-BE49-F238E27FC236}">
-                <a16:creationId xmlns:a16="http://schemas.microsoft.com/office/drawing/2014/main" id="{8EEA16A3-65AC-41D0-BCD9-A056DD563A52}"/>
+                <a16:creationId xmlns:a16="http://schemas.microsoft.com/office/drawing/2014/main" id="{55CF904E-3ECF-40A2-9F44-E4FE53F1759A}"/>
               </a:ext>
             </a:extLst>
           </p:cNvPr>
@@ -4195,7 +4195,7 @@
     </p:spTree>
     <p:extLst>
       <p:ext uri="{BB962C8B-B14F-4D97-AF65-F5344CB8AC3E}">
-        <p14:creationId xmlns:p14="http://schemas.microsoft.com/office/powerpoint/2010/main" val="491576338"/>
+        <p14:creationId xmlns:p14="http://schemas.microsoft.com/office/powerpoint/2010/main" val="1138805667"/>
       </p:ext>
     </p:extLst>
   </p:cSld>
@@ -4350,7 +4350,7 @@
           <p:cNvPr id="23" name="">
             <a:extLst xmlns:a="http://schemas.openxmlformats.org/drawingml/2006/main">
               <a:ext uri="{FF2B5EF4-FFF2-40B4-BE49-F238E27FC236}">
-                <a16:creationId xmlns:a16="http://schemas.microsoft.com/office/drawing/2014/main" id="{D3EBB27A-943D-49FE-8C0C-C9869814D486}"/>
+                <a16:creationId xmlns:a16="http://schemas.microsoft.com/office/drawing/2014/main" id="{60E1FB1A-8152-4371-A8CB-5E355E99C374}"/>
               </a:ext>
             </a:extLst>
           </p:cNvPr>
@@ -4382,7 +4382,7 @@
           <p:cNvPr id="2" name="">
             <a:extLst xmlns:a="http://schemas.openxmlformats.org/drawingml/2006/main">
               <a:ext uri="{FF2B5EF4-FFF2-40B4-BE49-F238E27FC236}">
-                <a16:creationId xmlns:a16="http://schemas.microsoft.com/office/drawing/2014/main" id="{E0BA0B2C-1DAA-4CDE-A46D-D3E4FC2344FC}"/>
+                <a16:creationId xmlns:a16="http://schemas.microsoft.com/office/drawing/2014/main" id="{70AEE8DD-6CAB-4991-8354-C232101FE986}"/>
               </a:ext>
             </a:extLst>
           </p:cNvPr>
@@ -4439,7 +4439,7 @@
           <p:cNvPr id="3" name="">
             <a:extLst xmlns:a="http://schemas.openxmlformats.org/drawingml/2006/main">
               <a:ext uri="{FF2B5EF4-FFF2-40B4-BE49-F238E27FC236}">
-                <a16:creationId xmlns:a16="http://schemas.microsoft.com/office/drawing/2014/main" id="{523B7DE6-1F3F-4EAD-BD05-F86366EA7312}"/>
+                <a16:creationId xmlns:a16="http://schemas.microsoft.com/office/drawing/2014/main" id="{A1D7EA3D-5E97-400A-B99D-6193FA49D06F}"/>
               </a:ext>
             </a:extLst>
           </p:cNvPr>
@@ -4471,7 +4471,7 @@
           <p:cNvPr id="4" name="">
             <a:extLst xmlns:a="http://schemas.openxmlformats.org/drawingml/2006/main">
               <a:ext uri="{FF2B5EF4-FFF2-40B4-BE49-F238E27FC236}">
-                <a16:creationId xmlns:a16="http://schemas.microsoft.com/office/drawing/2014/main" id="{1B8D8B82-7CA6-4C55-988F-18B5B0CD2DAE}"/>
+                <a16:creationId xmlns:a16="http://schemas.microsoft.com/office/drawing/2014/main" id="{7699A53D-7240-41CD-8D2C-12F057EB69CB}"/>
               </a:ext>
             </a:extLst>
           </p:cNvPr>
@@ -4528,7 +4528,7 @@
           <p:cNvPr id="5" name="">
             <a:extLst xmlns:a="http://schemas.openxmlformats.org/drawingml/2006/main">
               <a:ext uri="{FF2B5EF4-FFF2-40B4-BE49-F238E27FC236}">
-                <a16:creationId xmlns:a16="http://schemas.microsoft.com/office/drawing/2014/main" id="{6496B990-37E6-4138-BAC1-02EE5D65B2B7}"/>
+                <a16:creationId xmlns:a16="http://schemas.microsoft.com/office/drawing/2014/main" id="{131ADCEA-3574-4FAE-BBDC-3EAE7013FC19}"/>
               </a:ext>
             </a:extLst>
           </p:cNvPr>
@@ -4585,7 +4585,7 @@
           <p:cNvPr id="6" name="">
             <a:extLst xmlns:a="http://schemas.openxmlformats.org/drawingml/2006/main">
               <a:ext uri="{FF2B5EF4-FFF2-40B4-BE49-F238E27FC236}">
-                <a16:creationId xmlns:a16="http://schemas.microsoft.com/office/drawing/2014/main" id="{DEFC7EC2-D3C1-462D-9D7D-126F5D144C9A}"/>
+                <a16:creationId xmlns:a16="http://schemas.microsoft.com/office/drawing/2014/main" id="{5F9D1AC9-0531-432F-ABEE-77E7C6F22834}"/>
               </a:ext>
             </a:extLst>
           </p:cNvPr>
@@ -4642,7 +4642,7 @@
           <p:cNvPr id="7" name="">
             <a:extLst xmlns:a="http://schemas.openxmlformats.org/drawingml/2006/main">
               <a:ext uri="{FF2B5EF4-FFF2-40B4-BE49-F238E27FC236}">
-                <a16:creationId xmlns:a16="http://schemas.microsoft.com/office/drawing/2014/main" id="{D46B6A24-8EEB-45A6-9C29-17F3889126EE}"/>
+                <a16:creationId xmlns:a16="http://schemas.microsoft.com/office/drawing/2014/main" id="{68B8B63F-0645-4377-9ABB-B09BDEB31B91}"/>
               </a:ext>
             </a:extLst>
           </p:cNvPr>
@@ -4674,7 +4674,7 @@
           <p:cNvPr id="8" name="">
             <a:extLst xmlns:a="http://schemas.openxmlformats.org/drawingml/2006/main">
               <a:ext uri="{FF2B5EF4-FFF2-40B4-BE49-F238E27FC236}">
-                <a16:creationId xmlns:a16="http://schemas.microsoft.com/office/drawing/2014/main" id="{446F4216-E651-4E67-95C2-2F98B01C5413}"/>
+                <a16:creationId xmlns:a16="http://schemas.microsoft.com/office/drawing/2014/main" id="{2BD43CBB-93D2-4C2D-9438-07511952A469}"/>
               </a:ext>
             </a:extLst>
           </p:cNvPr>
@@ -4731,7 +4731,7 @@
           <p:cNvPr id="9" name="">
             <a:extLst xmlns:a="http://schemas.openxmlformats.org/drawingml/2006/main">
               <a:ext uri="{FF2B5EF4-FFF2-40B4-BE49-F238E27FC236}">
-                <a16:creationId xmlns:a16="http://schemas.microsoft.com/office/drawing/2014/main" id="{B9F23FE7-1256-46B9-97F4-916C0423C9C9}"/>
+                <a16:creationId xmlns:a16="http://schemas.microsoft.com/office/drawing/2014/main" id="{75E5D6DD-1E34-4A7C-9E1F-9F00E54AE0C5}"/>
               </a:ext>
             </a:extLst>
           </p:cNvPr>
@@ -4788,7 +4788,7 @@
           <p:cNvPr id="10" name="">
             <a:extLst xmlns:a="http://schemas.openxmlformats.org/drawingml/2006/main">
               <a:ext uri="{FF2B5EF4-FFF2-40B4-BE49-F238E27FC236}">
-                <a16:creationId xmlns:a16="http://schemas.microsoft.com/office/drawing/2014/main" id="{A5D6DCE2-FDD6-42B7-9806-FDAB1EB20F98}"/>
+                <a16:creationId xmlns:a16="http://schemas.microsoft.com/office/drawing/2014/main" id="{16E4DAD4-F516-422F-976F-489EB1FD11C2}"/>
               </a:ext>
             </a:extLst>
           </p:cNvPr>
@@ -4822,7 +4822,7 @@
           <p:cNvPr id="11" name="">
             <a:extLst xmlns:a="http://schemas.openxmlformats.org/drawingml/2006/main">
               <a:ext uri="{FF2B5EF4-FFF2-40B4-BE49-F238E27FC236}">
-                <a16:creationId xmlns:a16="http://schemas.microsoft.com/office/drawing/2014/main" id="{1F319727-DB2B-46F8-B005-C6196A2CA898}"/>
+                <a16:creationId xmlns:a16="http://schemas.microsoft.com/office/drawing/2014/main" id="{14EDBB61-7814-45CC-A680-EC5726BA5806}"/>
               </a:ext>
             </a:extLst>
           </p:cNvPr>
@@ -4854,7 +4854,7 @@
           <p:cNvPr id="12" name="">
             <a:extLst xmlns:a="http://schemas.openxmlformats.org/drawingml/2006/main">
               <a:ext uri="{FF2B5EF4-FFF2-40B4-BE49-F238E27FC236}">
-                <a16:creationId xmlns:a16="http://schemas.microsoft.com/office/drawing/2014/main" id="{3ED863C7-9635-4EE1-A62E-249BC20FE857}"/>
+                <a16:creationId xmlns:a16="http://schemas.microsoft.com/office/drawing/2014/main" id="{76BD9CA4-0BD6-47CE-AFCF-F16DF6BF02B5}"/>
               </a:ext>
             </a:extLst>
           </p:cNvPr>
@@ -4911,7 +4911,7 @@
           <p:cNvPr id="13" name="">
             <a:extLst xmlns:a="http://schemas.openxmlformats.org/drawingml/2006/main">
               <a:ext uri="{FF2B5EF4-FFF2-40B4-BE49-F238E27FC236}">
-                <a16:creationId xmlns:a16="http://schemas.microsoft.com/office/drawing/2014/main" id="{16B03891-D9ED-4288-BB64-1641DB4EF7E9}"/>
+                <a16:creationId xmlns:a16="http://schemas.microsoft.com/office/drawing/2014/main" id="{BB28E693-282D-4474-B511-BFA98C5436F0}"/>
               </a:ext>
             </a:extLst>
           </p:cNvPr>
@@ -4968,7 +4968,7 @@
           <p:cNvPr id="14" name="">
             <a:extLst xmlns:a="http://schemas.openxmlformats.org/drawingml/2006/main">
               <a:ext uri="{FF2B5EF4-FFF2-40B4-BE49-F238E27FC236}">
-                <a16:creationId xmlns:a16="http://schemas.microsoft.com/office/drawing/2014/main" id="{6D64ED34-70BD-46BD-9B0E-8B1515EDD70A}"/>
+                <a16:creationId xmlns:a16="http://schemas.microsoft.com/office/drawing/2014/main" id="{F8DFE73B-B739-4074-94A9-2BF3B1B405FB}"/>
               </a:ext>
             </a:extLst>
           </p:cNvPr>
@@ -5002,7 +5002,7 @@
           <p:cNvPr id="15" name="">
             <a:extLst xmlns:a="http://schemas.openxmlformats.org/drawingml/2006/main">
               <a:ext uri="{FF2B5EF4-FFF2-40B4-BE49-F238E27FC236}">
-                <a16:creationId xmlns:a16="http://schemas.microsoft.com/office/drawing/2014/main" id="{44B8AD36-78D7-49BD-839A-97E7D4997463}"/>
+                <a16:creationId xmlns:a16="http://schemas.microsoft.com/office/drawing/2014/main" id="{20EC0498-A025-419C-97F4-8049A789B9FA}"/>
               </a:ext>
             </a:extLst>
           </p:cNvPr>
@@ -5034,7 +5034,7 @@
           <p:cNvPr id="16" name="">
             <a:extLst xmlns:a="http://schemas.openxmlformats.org/drawingml/2006/main">
               <a:ext uri="{FF2B5EF4-FFF2-40B4-BE49-F238E27FC236}">
-                <a16:creationId xmlns:a16="http://schemas.microsoft.com/office/drawing/2014/main" id="{C648032C-6D96-43A9-86AD-3480F5D0098D}"/>
+                <a16:creationId xmlns:a16="http://schemas.microsoft.com/office/drawing/2014/main" id="{AA759848-406A-4ECB-95D6-51A4CCC4F17D}"/>
               </a:ext>
             </a:extLst>
           </p:cNvPr>
@@ -5091,7 +5091,7 @@
           <p:cNvPr id="17" name="">
             <a:extLst xmlns:a="http://schemas.openxmlformats.org/drawingml/2006/main">
               <a:ext uri="{FF2B5EF4-FFF2-40B4-BE49-F238E27FC236}">
-                <a16:creationId xmlns:a16="http://schemas.microsoft.com/office/drawing/2014/main" id="{15C690D0-CE3F-4E5A-95B9-97CFCB288E4B}"/>
+                <a16:creationId xmlns:a16="http://schemas.microsoft.com/office/drawing/2014/main" id="{B3A90F1C-1CDB-4BF7-945C-C524E4087981}"/>
               </a:ext>
             </a:extLst>
           </p:cNvPr>
@@ -5148,7 +5148,7 @@
           <p:cNvPr id="18" name="">
             <a:extLst xmlns:a="http://schemas.openxmlformats.org/drawingml/2006/main">
               <a:ext uri="{FF2B5EF4-FFF2-40B4-BE49-F238E27FC236}">
-                <a16:creationId xmlns:a16="http://schemas.microsoft.com/office/drawing/2014/main" id="{20A91EAD-0829-49FD-B316-884E5BF7E179}"/>
+                <a16:creationId xmlns:a16="http://schemas.microsoft.com/office/drawing/2014/main" id="{76FD889D-8888-4DB4-B741-E8AAB066353D}"/>
               </a:ext>
             </a:extLst>
           </p:cNvPr>
@@ -5182,7 +5182,7 @@
           <p:cNvPr id="19" name="">
             <a:extLst xmlns:a="http://schemas.openxmlformats.org/drawingml/2006/main">
               <a:ext uri="{FF2B5EF4-FFF2-40B4-BE49-F238E27FC236}">
-                <a16:creationId xmlns:a16="http://schemas.microsoft.com/office/drawing/2014/main" id="{D633816D-B88D-4BDC-B752-B999B622D99E}"/>
+                <a16:creationId xmlns:a16="http://schemas.microsoft.com/office/drawing/2014/main" id="{64CB9164-9105-44A2-AB9F-33F958AE614A}"/>
               </a:ext>
             </a:extLst>
           </p:cNvPr>
@@ -5214,7 +5214,7 @@
           <p:cNvPr id="20" name="">
             <a:extLst xmlns:a="http://schemas.openxmlformats.org/drawingml/2006/main">
               <a:ext uri="{FF2B5EF4-FFF2-40B4-BE49-F238E27FC236}">
-                <a16:creationId xmlns:a16="http://schemas.microsoft.com/office/drawing/2014/main" id="{9F0D1353-02AF-490B-9C42-92A8E1BB07B4}"/>
+                <a16:creationId xmlns:a16="http://schemas.microsoft.com/office/drawing/2014/main" id="{DDD6557C-9997-468C-9350-199E934C2B77}"/>
               </a:ext>
             </a:extLst>
           </p:cNvPr>
@@ -5271,7 +5271,7 @@
           <p:cNvPr id="21" name="">
             <a:extLst xmlns:a="http://schemas.openxmlformats.org/drawingml/2006/main">
               <a:ext uri="{FF2B5EF4-FFF2-40B4-BE49-F238E27FC236}">
-                <a16:creationId xmlns:a16="http://schemas.microsoft.com/office/drawing/2014/main" id="{295596D1-0906-4445-9E89-E6674FC1FCDC}"/>
+                <a16:creationId xmlns:a16="http://schemas.microsoft.com/office/drawing/2014/main" id="{71861F1A-B5BC-4CF4-8AE0-0333DDA004DA}"/>
               </a:ext>
             </a:extLst>
           </p:cNvPr>
@@ -5328,7 +5328,7 @@
           <p:cNvPr id="22" name="">
             <a:extLst xmlns:a="http://schemas.openxmlformats.org/drawingml/2006/main">
               <a:ext uri="{FF2B5EF4-FFF2-40B4-BE49-F238E27FC236}">
-                <a16:creationId xmlns:a16="http://schemas.microsoft.com/office/drawing/2014/main" id="{273C7F70-94A7-4B2D-8067-A88A23A247F3}"/>
+                <a16:creationId xmlns:a16="http://schemas.microsoft.com/office/drawing/2014/main" id="{0EF0E2D1-750D-4EB6-8FD6-881805DF394F}"/>
               </a:ext>
             </a:extLst>
           </p:cNvPr>
@@ -5383,7 +5383,7 @@
     </p:spTree>
     <p:extLst>
       <p:ext uri="{BB962C8B-B14F-4D97-AF65-F5344CB8AC3E}">
-        <p14:creationId xmlns:p14="http://schemas.microsoft.com/office/powerpoint/2010/main" val="1123227843"/>
+        <p14:creationId xmlns:p14="http://schemas.microsoft.com/office/powerpoint/2010/main" val="1775220462"/>
       </p:ext>
     </p:extLst>
   </p:cSld>
@@ -5584,7 +5584,7 @@
           <p:cNvPr id="23" name="">
             <a:extLst xmlns:a="http://schemas.openxmlformats.org/drawingml/2006/main">
               <a:ext uri="{FF2B5EF4-FFF2-40B4-BE49-F238E27FC236}">
-                <a16:creationId xmlns:a16="http://schemas.microsoft.com/office/drawing/2014/main" id="{C7DA65DF-3539-4E8A-A8AD-F1AB5DB68953}"/>
+                <a16:creationId xmlns:a16="http://schemas.microsoft.com/office/drawing/2014/main" id="{6161146F-C873-4D6D-ADBE-ACFFBDD1A162}"/>
               </a:ext>
             </a:extLst>
           </p:cNvPr>
@@ -5616,7 +5616,7 @@
           <p:cNvPr id="2" name="">
             <a:extLst xmlns:a="http://schemas.openxmlformats.org/drawingml/2006/main">
               <a:ext uri="{FF2B5EF4-FFF2-40B4-BE49-F238E27FC236}">
-                <a16:creationId xmlns:a16="http://schemas.microsoft.com/office/drawing/2014/main" id="{42F835DB-938C-4403-878C-B98DB8B9BB4D}"/>
+                <a16:creationId xmlns:a16="http://schemas.microsoft.com/office/drawing/2014/main" id="{7CBC903C-363C-4EDE-91B7-B11D4618BBD0}"/>
               </a:ext>
             </a:extLst>
           </p:cNvPr>
@@ -5673,7 +5673,7 @@
           <p:cNvPr id="3" name="">
             <a:extLst xmlns:a="http://schemas.openxmlformats.org/drawingml/2006/main">
               <a:ext uri="{FF2B5EF4-FFF2-40B4-BE49-F238E27FC236}">
-                <a16:creationId xmlns:a16="http://schemas.microsoft.com/office/drawing/2014/main" id="{1F4392A0-A786-4B57-89D8-8B82325C5842}"/>
+                <a16:creationId xmlns:a16="http://schemas.microsoft.com/office/drawing/2014/main" id="{9F4467C2-467E-4391-A37B-DB6AE515D066}"/>
               </a:ext>
             </a:extLst>
           </p:cNvPr>
@@ -5705,7 +5705,7 @@
           <p:cNvPr id="4" name="">
             <a:extLst xmlns:a="http://schemas.openxmlformats.org/drawingml/2006/main">
               <a:ext uri="{FF2B5EF4-FFF2-40B4-BE49-F238E27FC236}">
-                <a16:creationId xmlns:a16="http://schemas.microsoft.com/office/drawing/2014/main" id="{909253CC-DDFB-4B82-A096-2687168F4C30}"/>
+                <a16:creationId xmlns:a16="http://schemas.microsoft.com/office/drawing/2014/main" id="{336683AE-EB98-4889-A4D8-186CFAE767C5}"/>
               </a:ext>
             </a:extLst>
           </p:cNvPr>
@@ -5762,7 +5762,7 @@
           <p:cNvPr id="5" name="">
             <a:extLst xmlns:a="http://schemas.openxmlformats.org/drawingml/2006/main">
               <a:ext uri="{FF2B5EF4-FFF2-40B4-BE49-F238E27FC236}">
-                <a16:creationId xmlns:a16="http://schemas.microsoft.com/office/drawing/2014/main" id="{E71226CD-72CC-40EE-8F98-8C7E7A8A077C}"/>
+                <a16:creationId xmlns:a16="http://schemas.microsoft.com/office/drawing/2014/main" id="{81A67AB0-912F-4520-903E-417023A91819}"/>
               </a:ext>
             </a:extLst>
           </p:cNvPr>
@@ -5819,7 +5819,7 @@
           <p:cNvPr id="6" name="">
             <a:extLst xmlns:a="http://schemas.openxmlformats.org/drawingml/2006/main">
               <a:ext uri="{FF2B5EF4-FFF2-40B4-BE49-F238E27FC236}">
-                <a16:creationId xmlns:a16="http://schemas.microsoft.com/office/drawing/2014/main" id="{B8D584B9-2A82-4F37-A04C-9E69B461E2C4}"/>
+                <a16:creationId xmlns:a16="http://schemas.microsoft.com/office/drawing/2014/main" id="{A91D6258-8863-41FF-8AD6-D0200F874413}"/>
               </a:ext>
             </a:extLst>
           </p:cNvPr>
@@ -5876,7 +5876,7 @@
           <p:cNvPr id="7" name="">
             <a:extLst xmlns:a="http://schemas.openxmlformats.org/drawingml/2006/main">
               <a:ext uri="{FF2B5EF4-FFF2-40B4-BE49-F238E27FC236}">
-                <a16:creationId xmlns:a16="http://schemas.microsoft.com/office/drawing/2014/main" id="{8AD6F383-04BA-487E-827F-F8C006979CEA}"/>
+                <a16:creationId xmlns:a16="http://schemas.microsoft.com/office/drawing/2014/main" id="{AACDFE90-A67A-449D-B7F0-87583CECA26B}"/>
               </a:ext>
             </a:extLst>
           </p:cNvPr>
@@ -5908,7 +5908,7 @@
           <p:cNvPr id="8" name="">
             <a:extLst xmlns:a="http://schemas.openxmlformats.org/drawingml/2006/main">
               <a:ext uri="{FF2B5EF4-FFF2-40B4-BE49-F238E27FC236}">
-                <a16:creationId xmlns:a16="http://schemas.microsoft.com/office/drawing/2014/main" id="{A585ACDE-2EEF-4E7E-BBFA-AC05AE19D294}"/>
+                <a16:creationId xmlns:a16="http://schemas.microsoft.com/office/drawing/2014/main" id="{6DA2AA53-1313-48F6-B253-BAFCDDCEC04D}"/>
               </a:ext>
             </a:extLst>
           </p:cNvPr>
@@ -5965,7 +5965,7 @@
           <p:cNvPr id="9" name="">
             <a:extLst xmlns:a="http://schemas.openxmlformats.org/drawingml/2006/main">
               <a:ext uri="{FF2B5EF4-FFF2-40B4-BE49-F238E27FC236}">
-                <a16:creationId xmlns:a16="http://schemas.microsoft.com/office/drawing/2014/main" id="{BD92423C-DF47-443E-9B2D-2287B07EE6A9}"/>
+                <a16:creationId xmlns:a16="http://schemas.microsoft.com/office/drawing/2014/main" id="{90D7A6CB-7BDD-439A-A234-51D671E356B9}"/>
               </a:ext>
             </a:extLst>
           </p:cNvPr>
@@ -6022,7 +6022,7 @@
           <p:cNvPr id="10" name="">
             <a:extLst xmlns:a="http://schemas.openxmlformats.org/drawingml/2006/main">
               <a:ext uri="{FF2B5EF4-FFF2-40B4-BE49-F238E27FC236}">
-                <a16:creationId xmlns:a16="http://schemas.microsoft.com/office/drawing/2014/main" id="{3FE3D822-3F79-48CD-8D17-907B4D599AF5}"/>
+                <a16:creationId xmlns:a16="http://schemas.microsoft.com/office/drawing/2014/main" id="{E84AE887-3498-4D1C-978F-E40F1FDE1002}"/>
               </a:ext>
             </a:extLst>
           </p:cNvPr>
@@ -6056,7 +6056,7 @@
           <p:cNvPr id="11" name="">
             <a:extLst xmlns:a="http://schemas.openxmlformats.org/drawingml/2006/main">
               <a:ext uri="{FF2B5EF4-FFF2-40B4-BE49-F238E27FC236}">
-                <a16:creationId xmlns:a16="http://schemas.microsoft.com/office/drawing/2014/main" id="{C5AE9F0B-EF52-4ADC-9E75-E7DEAA880B1C}"/>
+                <a16:creationId xmlns:a16="http://schemas.microsoft.com/office/drawing/2014/main" id="{CC6D3146-72F8-47FC-932D-F379DE6FD37E}"/>
               </a:ext>
             </a:extLst>
           </p:cNvPr>
@@ -6088,7 +6088,7 @@
           <p:cNvPr id="12" name="">
             <a:extLst xmlns:a="http://schemas.openxmlformats.org/drawingml/2006/main">
               <a:ext uri="{FF2B5EF4-FFF2-40B4-BE49-F238E27FC236}">
-                <a16:creationId xmlns:a16="http://schemas.microsoft.com/office/drawing/2014/main" id="{CF2B8CA4-B799-427B-862B-D719800478FB}"/>
+                <a16:creationId xmlns:a16="http://schemas.microsoft.com/office/drawing/2014/main" id="{45654471-9802-4425-8B6C-F6B4570E8748}"/>
               </a:ext>
             </a:extLst>
           </p:cNvPr>
@@ -6145,7 +6145,7 @@
           <p:cNvPr id="13" name="">
             <a:extLst xmlns:a="http://schemas.openxmlformats.org/drawingml/2006/main">
               <a:ext uri="{FF2B5EF4-FFF2-40B4-BE49-F238E27FC236}">
-                <a16:creationId xmlns:a16="http://schemas.microsoft.com/office/drawing/2014/main" id="{40CA06A6-F468-4530-B234-46204ACA0085}"/>
+                <a16:creationId xmlns:a16="http://schemas.microsoft.com/office/drawing/2014/main" id="{B6FC6953-EBD2-47F3-86E3-4688585606F6}"/>
               </a:ext>
             </a:extLst>
           </p:cNvPr>
@@ -6202,7 +6202,7 @@
           <p:cNvPr id="14" name="">
             <a:extLst xmlns:a="http://schemas.openxmlformats.org/drawingml/2006/main">
               <a:ext uri="{FF2B5EF4-FFF2-40B4-BE49-F238E27FC236}">
-                <a16:creationId xmlns:a16="http://schemas.microsoft.com/office/drawing/2014/main" id="{7A8F46F3-B6AE-4F59-9A3A-2581192B4CBA}"/>
+                <a16:creationId xmlns:a16="http://schemas.microsoft.com/office/drawing/2014/main" id="{AFEBDC43-54A0-4D5E-8734-38AF1FFB74E4}"/>
               </a:ext>
             </a:extLst>
           </p:cNvPr>
@@ -6236,7 +6236,7 @@
           <p:cNvPr id="15" name="">
             <a:extLst xmlns:a="http://schemas.openxmlformats.org/drawingml/2006/main">
               <a:ext uri="{FF2B5EF4-FFF2-40B4-BE49-F238E27FC236}">
-                <a16:creationId xmlns:a16="http://schemas.microsoft.com/office/drawing/2014/main" id="{D0A01BFF-E2B5-462F-BB3C-033BA4BA94EE}"/>
+                <a16:creationId xmlns:a16="http://schemas.microsoft.com/office/drawing/2014/main" id="{1F4D5F98-7AAE-45E8-B709-6A740C5E4F37}"/>
               </a:ext>
             </a:extLst>
           </p:cNvPr>
@@ -6268,7 +6268,7 @@
           <p:cNvPr id="16" name="">
             <a:extLst xmlns:a="http://schemas.openxmlformats.org/drawingml/2006/main">
               <a:ext uri="{FF2B5EF4-FFF2-40B4-BE49-F238E27FC236}">
-                <a16:creationId xmlns:a16="http://schemas.microsoft.com/office/drawing/2014/main" id="{5C92DE0A-432B-42B1-8F68-7879209CEF46}"/>
+                <a16:creationId xmlns:a16="http://schemas.microsoft.com/office/drawing/2014/main" id="{B8ED8DE5-DAA2-4FDF-BC12-3553595F8F13}"/>
               </a:ext>
             </a:extLst>
           </p:cNvPr>
@@ -6325,7 +6325,7 @@
           <p:cNvPr id="17" name="">
             <a:extLst xmlns:a="http://schemas.openxmlformats.org/drawingml/2006/main">
               <a:ext uri="{FF2B5EF4-FFF2-40B4-BE49-F238E27FC236}">
-                <a16:creationId xmlns:a16="http://schemas.microsoft.com/office/drawing/2014/main" id="{5E3CE0E1-077A-41BB-B875-07EC0B488797}"/>
+                <a16:creationId xmlns:a16="http://schemas.microsoft.com/office/drawing/2014/main" id="{A5E727F5-DE71-4F69-B522-C49D87241EFD}"/>
               </a:ext>
             </a:extLst>
           </p:cNvPr>
@@ -6382,7 +6382,7 @@
           <p:cNvPr id="18" name="">
             <a:extLst xmlns:a="http://schemas.openxmlformats.org/drawingml/2006/main">
               <a:ext uri="{FF2B5EF4-FFF2-40B4-BE49-F238E27FC236}">
-                <a16:creationId xmlns:a16="http://schemas.microsoft.com/office/drawing/2014/main" id="{E2DFBC06-25D3-4B9B-8475-9E5BE442DF55}"/>
+                <a16:creationId xmlns:a16="http://schemas.microsoft.com/office/drawing/2014/main" id="{6E473F0A-49EF-4E3D-824E-5ECA9136731F}"/>
               </a:ext>
             </a:extLst>
           </p:cNvPr>
@@ -6416,7 +6416,7 @@
           <p:cNvPr id="19" name="">
             <a:extLst xmlns:a="http://schemas.openxmlformats.org/drawingml/2006/main">
               <a:ext uri="{FF2B5EF4-FFF2-40B4-BE49-F238E27FC236}">
-                <a16:creationId xmlns:a16="http://schemas.microsoft.com/office/drawing/2014/main" id="{CC25B691-7E02-4741-8017-C7021B4DD8C1}"/>
+                <a16:creationId xmlns:a16="http://schemas.microsoft.com/office/drawing/2014/main" id="{8B8CEB5B-B0A8-4F0E-8E98-ADF903731576}"/>
               </a:ext>
             </a:extLst>
           </p:cNvPr>
@@ -6448,7 +6448,7 @@
           <p:cNvPr id="20" name="">
             <a:extLst xmlns:a="http://schemas.openxmlformats.org/drawingml/2006/main">
               <a:ext uri="{FF2B5EF4-FFF2-40B4-BE49-F238E27FC236}">
-                <a16:creationId xmlns:a16="http://schemas.microsoft.com/office/drawing/2014/main" id="{BBC0435F-6E97-45CA-880F-27B99462417B}"/>
+                <a16:creationId xmlns:a16="http://schemas.microsoft.com/office/drawing/2014/main" id="{C7BFF632-928B-41FC-98A6-6EC37BC70BE1}"/>
               </a:ext>
             </a:extLst>
           </p:cNvPr>
@@ -6505,7 +6505,7 @@
           <p:cNvPr id="21" name="">
             <a:extLst xmlns:a="http://schemas.openxmlformats.org/drawingml/2006/main">
               <a:ext uri="{FF2B5EF4-FFF2-40B4-BE49-F238E27FC236}">
-                <a16:creationId xmlns:a16="http://schemas.microsoft.com/office/drawing/2014/main" id="{9C67B2F6-8D8B-4207-AAA6-DE90337BDFE1}"/>
+                <a16:creationId xmlns:a16="http://schemas.microsoft.com/office/drawing/2014/main" id="{DFF6D0D7-2A18-4633-AAD0-CC844CE4080C}"/>
               </a:ext>
             </a:extLst>
           </p:cNvPr>
@@ -6562,7 +6562,7 @@
           <p:cNvPr id="22" name="">
             <a:extLst xmlns:a="http://schemas.openxmlformats.org/drawingml/2006/main">
               <a:ext uri="{FF2B5EF4-FFF2-40B4-BE49-F238E27FC236}">
-                <a16:creationId xmlns:a16="http://schemas.microsoft.com/office/drawing/2014/main" id="{BC45E4A3-F373-40B1-B5B6-35F28C411194}"/>
+                <a16:creationId xmlns:a16="http://schemas.microsoft.com/office/drawing/2014/main" id="{C5247A1B-8294-49D7-8841-C3819923A1D5}"/>
               </a:ext>
             </a:extLst>
           </p:cNvPr>
@@ -6617,7 +6617,7 @@
     </p:spTree>
     <p:extLst>
       <p:ext uri="{BB962C8B-B14F-4D97-AF65-F5344CB8AC3E}">
-        <p14:creationId xmlns:p14="http://schemas.microsoft.com/office/powerpoint/2010/main" val="1313982187"/>
+        <p14:creationId xmlns:p14="http://schemas.microsoft.com/office/powerpoint/2010/main" val="1394175854"/>
       </p:ext>
     </p:extLst>
   </p:cSld>
@@ -6818,7 +6818,7 @@
           <p:cNvPr id="16" name="">
             <a:extLst xmlns:a="http://schemas.openxmlformats.org/drawingml/2006/main">
               <a:ext uri="{FF2B5EF4-FFF2-40B4-BE49-F238E27FC236}">
-                <a16:creationId xmlns:a16="http://schemas.microsoft.com/office/drawing/2014/main" id="{9E34842D-78ED-44F9-9938-2F3A5D70FEB4}"/>
+                <a16:creationId xmlns:a16="http://schemas.microsoft.com/office/drawing/2014/main" id="{8417A88B-DFFD-436F-AD12-4D8E61CF6678}"/>
               </a:ext>
             </a:extLst>
           </p:cNvPr>
@@ -6850,7 +6850,7 @@
           <p:cNvPr id="2" name="">
             <a:extLst xmlns:a="http://schemas.openxmlformats.org/drawingml/2006/main">
               <a:ext uri="{FF2B5EF4-FFF2-40B4-BE49-F238E27FC236}">
-                <a16:creationId xmlns:a16="http://schemas.microsoft.com/office/drawing/2014/main" id="{D00CB03B-904B-46CE-9923-BE441C5ED635}"/>
+                <a16:creationId xmlns:a16="http://schemas.microsoft.com/office/drawing/2014/main" id="{0A2E5BA6-D6E0-4508-8060-23C364896A9F}"/>
               </a:ext>
             </a:extLst>
           </p:cNvPr>
@@ -6907,7 +6907,7 @@
           <p:cNvPr id="3" name="">
             <a:extLst xmlns:a="http://schemas.openxmlformats.org/drawingml/2006/main">
               <a:ext uri="{FF2B5EF4-FFF2-40B4-BE49-F238E27FC236}">
-                <a16:creationId xmlns:a16="http://schemas.microsoft.com/office/drawing/2014/main" id="{B78F858E-26DB-4015-822B-69822AFFF6DB}"/>
+                <a16:creationId xmlns:a16="http://schemas.microsoft.com/office/drawing/2014/main" id="{2F3B6207-F8FA-4391-8ABC-9C66281ACFB8}"/>
               </a:ext>
             </a:extLst>
           </p:cNvPr>
@@ -6939,7 +6939,7 @@
           <p:cNvPr id="4" name="">
             <a:extLst xmlns:a="http://schemas.openxmlformats.org/drawingml/2006/main">
               <a:ext uri="{FF2B5EF4-FFF2-40B4-BE49-F238E27FC236}">
-                <a16:creationId xmlns:a16="http://schemas.microsoft.com/office/drawing/2014/main" id="{477F4BAE-4A27-41FE-AB36-919408D61003}"/>
+                <a16:creationId xmlns:a16="http://schemas.microsoft.com/office/drawing/2014/main" id="{9B36A72E-C7D9-4B0D-B359-B305652F1C68}"/>
               </a:ext>
             </a:extLst>
           </p:cNvPr>
@@ -6996,7 +6996,7 @@
           <p:cNvPr id="5" name="">
             <a:extLst xmlns:a="http://schemas.openxmlformats.org/drawingml/2006/main">
               <a:ext uri="{FF2B5EF4-FFF2-40B4-BE49-F238E27FC236}">
-                <a16:creationId xmlns:a16="http://schemas.microsoft.com/office/drawing/2014/main" id="{38E55028-F2C9-47B3-BBC7-5628C72C0B25}"/>
+                <a16:creationId xmlns:a16="http://schemas.microsoft.com/office/drawing/2014/main" id="{28D4B391-92B2-42CE-BBA2-501BCBBCE7CA}"/>
               </a:ext>
             </a:extLst>
           </p:cNvPr>
@@ -7053,7 +7053,7 @@
           <p:cNvPr id="6" name="">
             <a:extLst xmlns:a="http://schemas.openxmlformats.org/drawingml/2006/main">
               <a:ext uri="{FF2B5EF4-FFF2-40B4-BE49-F238E27FC236}">
-                <a16:creationId xmlns:a16="http://schemas.microsoft.com/office/drawing/2014/main" id="{6699D763-470B-4109-8E36-AE84823B0DE5}"/>
+                <a16:creationId xmlns:a16="http://schemas.microsoft.com/office/drawing/2014/main" id="{BDE5A502-9032-42D2-B194-FCAC5D1A407A}"/>
               </a:ext>
             </a:extLst>
           </p:cNvPr>
@@ -7110,7 +7110,7 @@
           <p:cNvPr id="7" name="">
             <a:extLst xmlns:a="http://schemas.openxmlformats.org/drawingml/2006/main">
               <a:ext uri="{FF2B5EF4-FFF2-40B4-BE49-F238E27FC236}">
-                <a16:creationId xmlns:a16="http://schemas.microsoft.com/office/drawing/2014/main" id="{34E59DCE-41E9-4C33-BF30-36444B86C074}"/>
+                <a16:creationId xmlns:a16="http://schemas.microsoft.com/office/drawing/2014/main" id="{79022DFE-B73F-4AE8-87CA-4D92A9673457}"/>
               </a:ext>
             </a:extLst>
           </p:cNvPr>
@@ -7142,7 +7142,7 @@
           <p:cNvPr id="8" name="">
             <a:extLst xmlns:a="http://schemas.openxmlformats.org/drawingml/2006/main">
               <a:ext uri="{FF2B5EF4-FFF2-40B4-BE49-F238E27FC236}">
-                <a16:creationId xmlns:a16="http://schemas.microsoft.com/office/drawing/2014/main" id="{F04123C0-4F6A-4A28-A444-C229C1BA9FF9}"/>
+                <a16:creationId xmlns:a16="http://schemas.microsoft.com/office/drawing/2014/main" id="{C7E90244-743D-421B-A0B0-B20A99F88E48}"/>
               </a:ext>
             </a:extLst>
           </p:cNvPr>
@@ -7199,7 +7199,7 @@
           <p:cNvPr id="9" name="">
             <a:extLst xmlns:a="http://schemas.openxmlformats.org/drawingml/2006/main">
               <a:ext uri="{FF2B5EF4-FFF2-40B4-BE49-F238E27FC236}">
-                <a16:creationId xmlns:a16="http://schemas.microsoft.com/office/drawing/2014/main" id="{0AAE310A-BC60-4343-8AC3-53D53D403843}"/>
+                <a16:creationId xmlns:a16="http://schemas.microsoft.com/office/drawing/2014/main" id="{CE2CA260-AFB6-49BE-9749-9622C525F699}"/>
               </a:ext>
             </a:extLst>
           </p:cNvPr>
@@ -7256,7 +7256,7 @@
           <p:cNvPr id="10" name="">
             <a:extLst xmlns:a="http://schemas.openxmlformats.org/drawingml/2006/main">
               <a:ext uri="{FF2B5EF4-FFF2-40B4-BE49-F238E27FC236}">
-                <a16:creationId xmlns:a16="http://schemas.microsoft.com/office/drawing/2014/main" id="{A647A9E0-8413-4BF3-8517-7351FF97559B}"/>
+                <a16:creationId xmlns:a16="http://schemas.microsoft.com/office/drawing/2014/main" id="{4906D7EA-8804-4856-9122-A83A997F93B7}"/>
               </a:ext>
             </a:extLst>
           </p:cNvPr>
@@ -7313,7 +7313,7 @@
           <p:cNvPr id="11" name="">
             <a:extLst xmlns:a="http://schemas.openxmlformats.org/drawingml/2006/main">
               <a:ext uri="{FF2B5EF4-FFF2-40B4-BE49-F238E27FC236}">
-                <a16:creationId xmlns:a16="http://schemas.microsoft.com/office/drawing/2014/main" id="{57DF17D8-DD3C-43F2-8EDA-E868D43660F8}"/>
+                <a16:creationId xmlns:a16="http://schemas.microsoft.com/office/drawing/2014/main" id="{3C117CEB-A24D-4D1C-BB22-51B6EB4DE3FD}"/>
               </a:ext>
             </a:extLst>
           </p:cNvPr>
@@ -7345,7 +7345,7 @@
           <p:cNvPr id="12" name="">
             <a:extLst xmlns:a="http://schemas.openxmlformats.org/drawingml/2006/main">
               <a:ext uri="{FF2B5EF4-FFF2-40B4-BE49-F238E27FC236}">
-                <a16:creationId xmlns:a16="http://schemas.microsoft.com/office/drawing/2014/main" id="{75E568BB-3454-4E9B-8DA8-3184473E3BCC}"/>
+                <a16:creationId xmlns:a16="http://schemas.microsoft.com/office/drawing/2014/main" id="{F16ADA03-12BA-443B-B6B8-73DA90695EE0}"/>
               </a:ext>
             </a:extLst>
           </p:cNvPr>
@@ -7402,7 +7402,7 @@
           <p:cNvPr id="13" name="">
             <a:extLst xmlns:a="http://schemas.openxmlformats.org/drawingml/2006/main">
               <a:ext uri="{FF2B5EF4-FFF2-40B4-BE49-F238E27FC236}">
-                <a16:creationId xmlns:a16="http://schemas.microsoft.com/office/drawing/2014/main" id="{6C06A45F-A779-49D2-BEE2-66FCAA970583}"/>
+                <a16:creationId xmlns:a16="http://schemas.microsoft.com/office/drawing/2014/main" id="{84FA2402-AAE2-43EA-A39E-317B0951CD53}"/>
               </a:ext>
             </a:extLst>
           </p:cNvPr>
@@ -7459,7 +7459,7 @@
           <p:cNvPr id="14" name="">
             <a:extLst xmlns:a="http://schemas.openxmlformats.org/drawingml/2006/main">
               <a:ext uri="{FF2B5EF4-FFF2-40B4-BE49-F238E27FC236}">
-                <a16:creationId xmlns:a16="http://schemas.microsoft.com/office/drawing/2014/main" id="{74E0B951-62BB-4511-937B-E9D926649DBE}"/>
+                <a16:creationId xmlns:a16="http://schemas.microsoft.com/office/drawing/2014/main" id="{3512E894-DE43-4E4E-9D28-3398B2792904}"/>
               </a:ext>
             </a:extLst>
           </p:cNvPr>
@@ -7516,7 +7516,7 @@
           <p:cNvPr id="15" name="">
             <a:extLst xmlns:a="http://schemas.openxmlformats.org/drawingml/2006/main">
               <a:ext uri="{FF2B5EF4-FFF2-40B4-BE49-F238E27FC236}">
-                <a16:creationId xmlns:a16="http://schemas.microsoft.com/office/drawing/2014/main" id="{D39B3CB1-5A23-46A9-9A9D-10015ECD2C1A}"/>
+                <a16:creationId xmlns:a16="http://schemas.microsoft.com/office/drawing/2014/main" id="{085BDAF6-C828-4064-8C46-B0196710026F}"/>
               </a:ext>
             </a:extLst>
           </p:cNvPr>
@@ -7571,7 +7571,7 @@
     </p:spTree>
     <p:extLst>
       <p:ext uri="{BB962C8B-B14F-4D97-AF65-F5344CB8AC3E}">
-        <p14:creationId xmlns:p14="http://schemas.microsoft.com/office/powerpoint/2010/main" val="472155137"/>
+        <p14:creationId xmlns:p14="http://schemas.microsoft.com/office/powerpoint/2010/main" val="1510334194"/>
       </p:ext>
     </p:extLst>
   </p:cSld>
@@ -7772,7 +7772,7 @@
           <p:cNvPr id="23" name="">
             <a:extLst xmlns:a="http://schemas.openxmlformats.org/drawingml/2006/main">
               <a:ext uri="{FF2B5EF4-FFF2-40B4-BE49-F238E27FC236}">
-                <a16:creationId xmlns:a16="http://schemas.microsoft.com/office/drawing/2014/main" id="{03BDD5C3-AF5A-4E95-B9B6-EC9B0B6397E6}"/>
+                <a16:creationId xmlns:a16="http://schemas.microsoft.com/office/drawing/2014/main" id="{1A82782E-0403-4871-8EE9-70A71E9F2019}"/>
               </a:ext>
             </a:extLst>
           </p:cNvPr>
@@ -7804,7 +7804,7 @@
           <p:cNvPr id="2" name="">
             <a:extLst xmlns:a="http://schemas.openxmlformats.org/drawingml/2006/main">
               <a:ext uri="{FF2B5EF4-FFF2-40B4-BE49-F238E27FC236}">
-                <a16:creationId xmlns:a16="http://schemas.microsoft.com/office/drawing/2014/main" id="{6E194545-7518-466D-ABCC-A139F6D3ACB0}"/>
+                <a16:creationId xmlns:a16="http://schemas.microsoft.com/office/drawing/2014/main" id="{1A834676-3252-4FCF-BBFF-AA3E3365F08D}"/>
               </a:ext>
             </a:extLst>
           </p:cNvPr>
@@ -7861,7 +7861,7 @@
           <p:cNvPr id="3" name="">
             <a:extLst xmlns:a="http://schemas.openxmlformats.org/drawingml/2006/main">
               <a:ext uri="{FF2B5EF4-FFF2-40B4-BE49-F238E27FC236}">
-                <a16:creationId xmlns:a16="http://schemas.microsoft.com/office/drawing/2014/main" id="{5C03C1C9-4734-4228-9C43-B55E00A2F998}"/>
+                <a16:creationId xmlns:a16="http://schemas.microsoft.com/office/drawing/2014/main" id="{E46800C3-4FD7-41F5-86A4-CD2041CBF033}"/>
               </a:ext>
             </a:extLst>
           </p:cNvPr>
@@ -7893,7 +7893,7 @@
           <p:cNvPr id="4" name="">
             <a:extLst xmlns:a="http://schemas.openxmlformats.org/drawingml/2006/main">
               <a:ext uri="{FF2B5EF4-FFF2-40B4-BE49-F238E27FC236}">
-                <a16:creationId xmlns:a16="http://schemas.microsoft.com/office/drawing/2014/main" id="{B7C30177-1BBB-4E16-A3BE-DB83CACFE2BE}"/>
+                <a16:creationId xmlns:a16="http://schemas.microsoft.com/office/drawing/2014/main" id="{FAA6921F-71BF-4AE8-BC88-E8857D378177}"/>
               </a:ext>
             </a:extLst>
           </p:cNvPr>
@@ -7950,7 +7950,7 @@
           <p:cNvPr id="5" name="">
             <a:extLst xmlns:a="http://schemas.openxmlformats.org/drawingml/2006/main">
               <a:ext uri="{FF2B5EF4-FFF2-40B4-BE49-F238E27FC236}">
-                <a16:creationId xmlns:a16="http://schemas.microsoft.com/office/drawing/2014/main" id="{82FE4412-208C-4896-ABD1-8EDF632BC72C}"/>
+                <a16:creationId xmlns:a16="http://schemas.microsoft.com/office/drawing/2014/main" id="{EC50C12D-31AD-45BB-9719-AEA5B7412F22}"/>
               </a:ext>
             </a:extLst>
           </p:cNvPr>
@@ -8007,7 +8007,7 @@
           <p:cNvPr id="6" name="">
             <a:extLst xmlns:a="http://schemas.openxmlformats.org/drawingml/2006/main">
               <a:ext uri="{FF2B5EF4-FFF2-40B4-BE49-F238E27FC236}">
-                <a16:creationId xmlns:a16="http://schemas.microsoft.com/office/drawing/2014/main" id="{FDD7E770-CCD7-45CD-99F7-C1F55B009B9B}"/>
+                <a16:creationId xmlns:a16="http://schemas.microsoft.com/office/drawing/2014/main" id="{D281EEE0-6851-45AF-BB87-F465FA1D8887}"/>
               </a:ext>
             </a:extLst>
           </p:cNvPr>
@@ -8064,7 +8064,7 @@
           <p:cNvPr id="7" name="">
             <a:extLst xmlns:a="http://schemas.openxmlformats.org/drawingml/2006/main">
               <a:ext uri="{FF2B5EF4-FFF2-40B4-BE49-F238E27FC236}">
-                <a16:creationId xmlns:a16="http://schemas.microsoft.com/office/drawing/2014/main" id="{DC8FDB68-5806-44EC-852C-B1F41E06E225}"/>
+                <a16:creationId xmlns:a16="http://schemas.microsoft.com/office/drawing/2014/main" id="{53598B7D-2F88-49E0-84A1-C964F549EF46}"/>
               </a:ext>
             </a:extLst>
           </p:cNvPr>
@@ -8096,7 +8096,7 @@
           <p:cNvPr id="8" name="">
             <a:extLst xmlns:a="http://schemas.openxmlformats.org/drawingml/2006/main">
               <a:ext uri="{FF2B5EF4-FFF2-40B4-BE49-F238E27FC236}">
-                <a16:creationId xmlns:a16="http://schemas.microsoft.com/office/drawing/2014/main" id="{915E65DE-6C2A-4540-904E-EC19DA8DB240}"/>
+                <a16:creationId xmlns:a16="http://schemas.microsoft.com/office/drawing/2014/main" id="{F2633855-E46C-4227-9FE6-1E08BDA6ADFE}"/>
               </a:ext>
             </a:extLst>
           </p:cNvPr>
@@ -8153,7 +8153,7 @@
           <p:cNvPr id="9" name="">
             <a:extLst xmlns:a="http://schemas.openxmlformats.org/drawingml/2006/main">
               <a:ext uri="{FF2B5EF4-FFF2-40B4-BE49-F238E27FC236}">
-                <a16:creationId xmlns:a16="http://schemas.microsoft.com/office/drawing/2014/main" id="{E3FB9612-6136-45BD-847F-5B563D8A2158}"/>
+                <a16:creationId xmlns:a16="http://schemas.microsoft.com/office/drawing/2014/main" id="{5906CD58-E0E8-4CE8-B6FB-13842EEF252F}"/>
               </a:ext>
             </a:extLst>
           </p:cNvPr>
@@ -8210,19 +8210,19 @@
           <p:cNvPr id="10" name="">
             <a:extLst xmlns:a="http://schemas.openxmlformats.org/drawingml/2006/main">
               <a:ext uri="{FF2B5EF4-FFF2-40B4-BE49-F238E27FC236}">
-                <a16:creationId xmlns:a16="http://schemas.microsoft.com/office/drawing/2014/main" id="{5C954642-848D-41C5-9977-2B8873D35598}"/>
-              </a:ext>
-            </a:extLst>
-          </p:cNvPr>
-          <p:cNvSpPr>
-            <a:spLocks xmlns:a="http://schemas.openxmlformats.org/drawingml/2006/main" noGrp="1"/>
-          </p:cNvSpPr>
-          <p:nvPr/>
-        </p:nvSpPr>
-        <p:spPr>
-          <a:xfrm xmlns:a="http://schemas.openxmlformats.org/drawingml/2006/main">
-            <a:off x="914400" y="1257300"/>
-            <a:ext cx="10363200" cy="781050"/>
+                <a16:creationId xmlns:a16="http://schemas.microsoft.com/office/drawing/2014/main" id="{95B6A71D-3F84-4D05-97B1-F3ACEB982D4D}"/>
+              </a:ext>
+            </a:extLst>
+          </p:cNvPr>
+          <p:cNvSpPr>
+            <a:spLocks xmlns:a="http://schemas.openxmlformats.org/drawingml/2006/main" noGrp="1"/>
+          </p:cNvSpPr>
+          <p:nvPr/>
+        </p:nvSpPr>
+        <p:spPr>
+          <a:xfrm xmlns:a="http://schemas.openxmlformats.org/drawingml/2006/main">
+            <a:off x="857250" y="1219200"/>
+            <a:ext cx="10477500" cy="742950"/>
           </a:xfrm>
           <a:prstGeom xmlns:a="http://schemas.openxmlformats.org/drawingml/2006/main" prst="rect">
             <a:avLst/>
@@ -8239,7 +8239,7 @@
           <a:lstStyle xmlns:a="http://schemas.openxmlformats.org/drawingml/2006/main"/>
           <a:p xmlns:a="http://schemas.openxmlformats.org/drawingml/2006/main">
             <a:pPr algn="ctr">
-              <a:defRPr sz="2175" b="1">
+              <a:defRPr sz="2100" b="1">
                 <a:solidFill>
                   <a:srgbClr val="17253A"/>
                 </a:solidFill>
@@ -8249,7 +8249,7 @@
               </a:defRPr>
             </a:pPr>
             <a:r>
-              <a:rPr sz="2175" b="1">
+              <a:rPr sz="2100" b="1">
                 <a:solidFill>
                   <a:srgbClr val="17253A"/>
                 </a:solidFill>
@@ -8267,28 +8267,30 @@
           <p:cNvPr id="11" name="">
             <a:extLst xmlns:a="http://schemas.openxmlformats.org/drawingml/2006/main">
               <a:ext uri="{FF2B5EF4-FFF2-40B4-BE49-F238E27FC236}">
-                <a16:creationId xmlns:a16="http://schemas.microsoft.com/office/drawing/2014/main" id="{A6B9D847-94A1-4CC7-8C78-D644E16B9BC7}"/>
-              </a:ext>
-            </a:extLst>
-          </p:cNvPr>
-          <p:cNvSpPr>
-            <a:spLocks xmlns:a="http://schemas.openxmlformats.org/drawingml/2006/main" noGrp="1"/>
-          </p:cNvSpPr>
-          <p:nvPr/>
-        </p:nvSpPr>
-        <p:spPr>
-          <a:xfrm xmlns:a="http://schemas.openxmlformats.org/drawingml/2006/main">
-            <a:off x="1000125" y="2247900"/>
-            <a:ext cx="476250" cy="476250"/>
-          </a:xfrm>
-          <a:prstGeom xmlns:a="http://schemas.openxmlformats.org/drawingml/2006/main" prst="ellipse">
+                <a16:creationId xmlns:a16="http://schemas.microsoft.com/office/drawing/2014/main" id="{29480442-8BF1-416F-97CC-3623EF9100FA}"/>
+              </a:ext>
+            </a:extLst>
+          </p:cNvPr>
+          <p:cNvSpPr>
+            <a:spLocks xmlns:a="http://schemas.openxmlformats.org/drawingml/2006/main" noGrp="1"/>
+          </p:cNvSpPr>
+          <p:nvPr/>
+        </p:nvSpPr>
+        <p:spPr>
+          <a:xfrm xmlns:a="http://schemas.openxmlformats.org/drawingml/2006/main">
+            <a:off x="971550" y="2124075"/>
+            <a:ext cx="38100" cy="3524250"/>
+          </a:xfrm>
+          <a:prstGeom xmlns:a="http://schemas.openxmlformats.org/drawingml/2006/main" prst="rect">
             <a:avLst/>
           </a:prstGeom>
           <a:solidFill xmlns:a="http://schemas.openxmlformats.org/drawingml/2006/main">
-            <a:srgbClr val="18324A"/>
+            <a:srgbClr val="2C6E73"/>
           </a:solidFill>
           <a:ln xmlns:a="http://schemas.openxmlformats.org/drawingml/2006/main" w="0">
-            <a:noFill/>
+            <a:solidFill>
+              <a:srgbClr val="2C6E73"/>
+            </a:solidFill>
           </a:ln>
         </p:spPr>
       </p:sp>
@@ -8297,19 +8299,19 @@
           <p:cNvPr id="12" name="">
             <a:extLst xmlns:a="http://schemas.openxmlformats.org/drawingml/2006/main">
               <a:ext uri="{FF2B5EF4-FFF2-40B4-BE49-F238E27FC236}">
-                <a16:creationId xmlns:a16="http://schemas.microsoft.com/office/drawing/2014/main" id="{BAABFEC8-2FD2-4402-A4E0-A839BE246477}"/>
-              </a:ext>
-            </a:extLst>
-          </p:cNvPr>
-          <p:cNvSpPr>
-            <a:spLocks xmlns:a="http://schemas.openxmlformats.org/drawingml/2006/main" noGrp="1"/>
-          </p:cNvSpPr>
-          <p:nvPr/>
-        </p:nvSpPr>
-        <p:spPr>
-          <a:xfrm xmlns:a="http://schemas.openxmlformats.org/drawingml/2006/main">
-            <a:off x="1000125" y="2276475"/>
-            <a:ext cx="476250" cy="419100"/>
+                <a16:creationId xmlns:a16="http://schemas.microsoft.com/office/drawing/2014/main" id="{CD10D354-AA71-4C77-8EFD-F4B2D43FF963}"/>
+              </a:ext>
+            </a:extLst>
+          </p:cNvPr>
+          <p:cNvSpPr>
+            <a:spLocks xmlns:a="http://schemas.openxmlformats.org/drawingml/2006/main" noGrp="1"/>
+          </p:cNvSpPr>
+          <p:nvPr/>
+        </p:nvSpPr>
+        <p:spPr>
+          <a:xfrm xmlns:a="http://schemas.openxmlformats.org/drawingml/2006/main">
+            <a:off x="1162050" y="2200275"/>
+            <a:ext cx="400050" cy="400050"/>
           </a:xfrm>
           <a:prstGeom xmlns:a="http://schemas.openxmlformats.org/drawingml/2006/main" prst="rect">
             <a:avLst/>
@@ -8326,9 +8328,9 @@
           <a:lstStyle xmlns:a="http://schemas.openxmlformats.org/drawingml/2006/main"/>
           <a:p xmlns:a="http://schemas.openxmlformats.org/drawingml/2006/main">
             <a:pPr algn="ctr">
-              <a:defRPr sz="1350" b="1">
-                <a:solidFill>
-                  <a:srgbClr val="FFFFFF"/>
+              <a:defRPr sz="1125" b="1">
+                <a:solidFill>
+                  <a:srgbClr val="2C6E73"/>
                 </a:solidFill>
                 <a:latin typeface="Arial"/>
                 <a:ea typeface="Arial"/>
@@ -8336,9 +8338,9 @@
               </a:defRPr>
             </a:pPr>
             <a:r>
-              <a:rPr sz="1350" b="1">
-                <a:solidFill>
-                  <a:srgbClr val="FFFFFF"/>
+              <a:rPr sz="1125" b="1">
+                <a:solidFill>
+                  <a:srgbClr val="2C6E73"/>
                 </a:solidFill>
                 <a:latin typeface="Arial"/>
                 <a:ea typeface="Arial"/>
@@ -8354,19 +8356,19 @@
           <p:cNvPr id="13" name="">
             <a:extLst xmlns:a="http://schemas.openxmlformats.org/drawingml/2006/main">
               <a:ext uri="{FF2B5EF4-FFF2-40B4-BE49-F238E27FC236}">
-                <a16:creationId xmlns:a16="http://schemas.microsoft.com/office/drawing/2014/main" id="{3AB0CE6F-987D-41B1-BE56-40738CCC6886}"/>
-              </a:ext>
-            </a:extLst>
-          </p:cNvPr>
-          <p:cNvSpPr>
-            <a:spLocks xmlns:a="http://schemas.openxmlformats.org/drawingml/2006/main" noGrp="1"/>
-          </p:cNvSpPr>
-          <p:nvPr/>
-        </p:nvSpPr>
-        <p:spPr>
-          <a:xfrm xmlns:a="http://schemas.openxmlformats.org/drawingml/2006/main">
-            <a:off x="1714500" y="2181225"/>
-            <a:ext cx="9429750" cy="609600"/>
+                <a16:creationId xmlns:a16="http://schemas.microsoft.com/office/drawing/2014/main" id="{A83E06A4-DE28-46D2-888C-8A037091DAB0}"/>
+              </a:ext>
+            </a:extLst>
+          </p:cNvPr>
+          <p:cNvSpPr>
+            <a:spLocks xmlns:a="http://schemas.openxmlformats.org/drawingml/2006/main" noGrp="1"/>
+          </p:cNvSpPr>
+          <p:nvPr/>
+        </p:nvSpPr>
+        <p:spPr>
+          <a:xfrm xmlns:a="http://schemas.openxmlformats.org/drawingml/2006/main">
+            <a:off x="1714500" y="2114550"/>
+            <a:ext cx="9525000" cy="809625"/>
           </a:xfrm>
           <a:prstGeom xmlns:a="http://schemas.openxmlformats.org/drawingml/2006/main" prst="rect">
             <a:avLst/>
@@ -8383,7 +8385,7 @@
           <a:lstStyle xmlns:a="http://schemas.openxmlformats.org/drawingml/2006/main"/>
           <a:p xmlns:a="http://schemas.openxmlformats.org/drawingml/2006/main">
             <a:pPr algn="l">
-              <a:defRPr sz="1500" b="0">
+              <a:defRPr sz="1725" b="0">
                 <a:solidFill>
                   <a:srgbClr val="17253A"/>
                 </a:solidFill>
@@ -8393,7 +8395,7 @@
               </a:defRPr>
             </a:pPr>
             <a:r>
-              <a:rPr sz="1500" b="0">
+              <a:rPr sz="1725" b="0">
                 <a:solidFill>
                   <a:srgbClr val="17253A"/>
                 </a:solidFill>
@@ -8401,7 +8403,7 @@
                 <a:ea typeface="Arial"/>
                 <a:cs typeface="Arial"/>
               </a:rPr>
-              <a:t>Identify the structure: Mark known properties and angle facts on the diagram.</a:t>
+              <a:t>Angles in a quadrilateral total 360°</a:t>
             </a:r>
           </a:p>
         </p:txBody>
@@ -8411,28 +8413,30 @@
           <p:cNvPr id="14" name="">
             <a:extLst xmlns:a="http://schemas.openxmlformats.org/drawingml/2006/main">
               <a:ext uri="{FF2B5EF4-FFF2-40B4-BE49-F238E27FC236}">
-                <a16:creationId xmlns:a16="http://schemas.microsoft.com/office/drawing/2014/main" id="{B73A4796-3E7A-4147-B5BC-BEB9A47E52FE}"/>
-              </a:ext>
-            </a:extLst>
-          </p:cNvPr>
-          <p:cNvSpPr>
-            <a:spLocks xmlns:a="http://schemas.openxmlformats.org/drawingml/2006/main" noGrp="1"/>
-          </p:cNvSpPr>
-          <p:nvPr/>
-        </p:nvSpPr>
-        <p:spPr>
-          <a:xfrm xmlns:a="http://schemas.openxmlformats.org/drawingml/2006/main">
-            <a:off x="1000125" y="2990850"/>
-            <a:ext cx="476250" cy="476250"/>
-          </a:xfrm>
-          <a:prstGeom xmlns:a="http://schemas.openxmlformats.org/drawingml/2006/main" prst="ellipse">
+                <a16:creationId xmlns:a16="http://schemas.microsoft.com/office/drawing/2014/main" id="{34D3B00E-B148-487F-A79A-1F772C0B3E94}"/>
+              </a:ext>
+            </a:extLst>
+          </p:cNvPr>
+          <p:cNvSpPr>
+            <a:spLocks xmlns:a="http://schemas.openxmlformats.org/drawingml/2006/main" noGrp="1"/>
+          </p:cNvSpPr>
+          <p:nvPr/>
+        </p:nvSpPr>
+        <p:spPr>
+          <a:xfrm xmlns:a="http://schemas.openxmlformats.org/drawingml/2006/main">
+            <a:off x="1714500" y="2943225"/>
+            <a:ext cx="9334500" cy="9525"/>
+          </a:xfrm>
+          <a:prstGeom xmlns:a="http://schemas.openxmlformats.org/drawingml/2006/main" prst="rect">
             <a:avLst/>
           </a:prstGeom>
           <a:solidFill xmlns:a="http://schemas.openxmlformats.org/drawingml/2006/main">
-            <a:srgbClr val="2C6E73"/>
+            <a:srgbClr val="D9E0E6"/>
           </a:solidFill>
           <a:ln xmlns:a="http://schemas.openxmlformats.org/drawingml/2006/main" w="0">
-            <a:noFill/>
+            <a:solidFill>
+              <a:srgbClr val="D9E0E6"/>
+            </a:solidFill>
           </a:ln>
         </p:spPr>
       </p:sp>
@@ -8441,19 +8445,19 @@
           <p:cNvPr id="15" name="">
             <a:extLst xmlns:a="http://schemas.openxmlformats.org/drawingml/2006/main">
               <a:ext uri="{FF2B5EF4-FFF2-40B4-BE49-F238E27FC236}">
-                <a16:creationId xmlns:a16="http://schemas.microsoft.com/office/drawing/2014/main" id="{F65A11BA-B673-43CD-8066-6BA8DBA46885}"/>
-              </a:ext>
-            </a:extLst>
-          </p:cNvPr>
-          <p:cNvSpPr>
-            <a:spLocks xmlns:a="http://schemas.openxmlformats.org/drawingml/2006/main" noGrp="1"/>
-          </p:cNvSpPr>
-          <p:nvPr/>
-        </p:nvSpPr>
-        <p:spPr>
-          <a:xfrm xmlns:a="http://schemas.openxmlformats.org/drawingml/2006/main">
-            <a:off x="1000125" y="3019425"/>
-            <a:ext cx="476250" cy="419100"/>
+                <a16:creationId xmlns:a16="http://schemas.microsoft.com/office/drawing/2014/main" id="{B4EE04F6-3312-489E-9EF7-BF235D5F3DF6}"/>
+              </a:ext>
+            </a:extLst>
+          </p:cNvPr>
+          <p:cNvSpPr>
+            <a:spLocks xmlns:a="http://schemas.openxmlformats.org/drawingml/2006/main" noGrp="1"/>
+          </p:cNvSpPr>
+          <p:nvPr/>
+        </p:nvSpPr>
+        <p:spPr>
+          <a:xfrm xmlns:a="http://schemas.openxmlformats.org/drawingml/2006/main">
+            <a:off x="1162050" y="3076575"/>
+            <a:ext cx="400050" cy="400050"/>
           </a:xfrm>
           <a:prstGeom xmlns:a="http://schemas.openxmlformats.org/drawingml/2006/main" prst="rect">
             <a:avLst/>
@@ -8470,9 +8474,9 @@
           <a:lstStyle xmlns:a="http://schemas.openxmlformats.org/drawingml/2006/main"/>
           <a:p xmlns:a="http://schemas.openxmlformats.org/drawingml/2006/main">
             <a:pPr algn="ctr">
-              <a:defRPr sz="1350" b="1">
-                <a:solidFill>
-                  <a:srgbClr val="FFFFFF"/>
+              <a:defRPr sz="1125" b="1">
+                <a:solidFill>
+                  <a:srgbClr val="2C6E73"/>
                 </a:solidFill>
                 <a:latin typeface="Arial"/>
                 <a:ea typeface="Arial"/>
@@ -8480,9 +8484,9 @@
               </a:defRPr>
             </a:pPr>
             <a:r>
-              <a:rPr sz="1350" b="1">
-                <a:solidFill>
-                  <a:srgbClr val="FFFFFF"/>
+              <a:rPr sz="1125" b="1">
+                <a:solidFill>
+                  <a:srgbClr val="2C6E73"/>
                 </a:solidFill>
                 <a:latin typeface="Arial"/>
                 <a:ea typeface="Arial"/>
@@ -8498,19 +8502,19 @@
           <p:cNvPr id="16" name="">
             <a:extLst xmlns:a="http://schemas.openxmlformats.org/drawingml/2006/main">
               <a:ext uri="{FF2B5EF4-FFF2-40B4-BE49-F238E27FC236}">
-                <a16:creationId xmlns:a16="http://schemas.microsoft.com/office/drawing/2014/main" id="{FDDBFE45-9E7A-48E6-BC9D-21F4F6627220}"/>
-              </a:ext>
-            </a:extLst>
-          </p:cNvPr>
-          <p:cNvSpPr>
-            <a:spLocks xmlns:a="http://schemas.openxmlformats.org/drawingml/2006/main" noGrp="1"/>
-          </p:cNvSpPr>
-          <p:nvPr/>
-        </p:nvSpPr>
-        <p:spPr>
-          <a:xfrm xmlns:a="http://schemas.openxmlformats.org/drawingml/2006/main">
-            <a:off x="1714500" y="2924175"/>
-            <a:ext cx="9429750" cy="609600"/>
+                <a16:creationId xmlns:a16="http://schemas.microsoft.com/office/drawing/2014/main" id="{09322247-377F-4E60-A30A-08699924EA48}"/>
+              </a:ext>
+            </a:extLst>
+          </p:cNvPr>
+          <p:cNvSpPr>
+            <a:spLocks xmlns:a="http://schemas.openxmlformats.org/drawingml/2006/main" noGrp="1"/>
+          </p:cNvSpPr>
+          <p:nvPr/>
+        </p:nvSpPr>
+        <p:spPr>
+          <a:xfrm xmlns:a="http://schemas.openxmlformats.org/drawingml/2006/main">
+            <a:off x="1714500" y="2990850"/>
+            <a:ext cx="9525000" cy="809625"/>
           </a:xfrm>
           <a:prstGeom xmlns:a="http://schemas.openxmlformats.org/drawingml/2006/main" prst="rect">
             <a:avLst/>
@@ -8527,7 +8531,7 @@
           <a:lstStyle xmlns:a="http://schemas.openxmlformats.org/drawingml/2006/main"/>
           <a:p xmlns:a="http://schemas.openxmlformats.org/drawingml/2006/main">
             <a:pPr algn="l">
-              <a:defRPr sz="1500" b="0">
+              <a:defRPr sz="1725" b="0">
                 <a:solidFill>
                   <a:srgbClr val="17253A"/>
                 </a:solidFill>
@@ -8537,7 +8541,7 @@
               </a:defRPr>
             </a:pPr>
             <a:r>
-              <a:rPr sz="1500" b="0">
+              <a:rPr sz="1725" b="0">
                 <a:solidFill>
                   <a:srgbClr val="17253A"/>
                 </a:solidFill>
@@ -8545,7 +8549,7 @@
                 <a:ea typeface="Arial"/>
                 <a:cs typeface="Arial"/>
               </a:rPr>
-              <a:t>Set up the method: Form a calculation using angles on a line, around a point or inside a shape.</a:t>
+              <a:t>92° + 88° + 105° = 285°</a:t>
             </a:r>
           </a:p>
         </p:txBody>
@@ -8555,28 +8559,30 @@
           <p:cNvPr id="17" name="">
             <a:extLst xmlns:a="http://schemas.openxmlformats.org/drawingml/2006/main">
               <a:ext uri="{FF2B5EF4-FFF2-40B4-BE49-F238E27FC236}">
-                <a16:creationId xmlns:a16="http://schemas.microsoft.com/office/drawing/2014/main" id="{28E375C5-B38E-4D90-BAAD-8D856C1D7CA8}"/>
-              </a:ext>
-            </a:extLst>
-          </p:cNvPr>
-          <p:cNvSpPr>
-            <a:spLocks xmlns:a="http://schemas.openxmlformats.org/drawingml/2006/main" noGrp="1"/>
-          </p:cNvSpPr>
-          <p:nvPr/>
-        </p:nvSpPr>
-        <p:spPr>
-          <a:xfrm xmlns:a="http://schemas.openxmlformats.org/drawingml/2006/main">
-            <a:off x="1000125" y="3733800"/>
-            <a:ext cx="476250" cy="476250"/>
-          </a:xfrm>
-          <a:prstGeom xmlns:a="http://schemas.openxmlformats.org/drawingml/2006/main" prst="ellipse">
+                <a16:creationId xmlns:a16="http://schemas.microsoft.com/office/drawing/2014/main" id="{92AEA1E6-8A97-421D-AC88-2E9B7C51E645}"/>
+              </a:ext>
+            </a:extLst>
+          </p:cNvPr>
+          <p:cNvSpPr>
+            <a:spLocks xmlns:a="http://schemas.openxmlformats.org/drawingml/2006/main" noGrp="1"/>
+          </p:cNvSpPr>
+          <p:nvPr/>
+        </p:nvSpPr>
+        <p:spPr>
+          <a:xfrm xmlns:a="http://schemas.openxmlformats.org/drawingml/2006/main">
+            <a:off x="1714500" y="3819525"/>
+            <a:ext cx="9334500" cy="9525"/>
+          </a:xfrm>
+          <a:prstGeom xmlns:a="http://schemas.openxmlformats.org/drawingml/2006/main" prst="rect">
             <a:avLst/>
           </a:prstGeom>
           <a:solidFill xmlns:a="http://schemas.openxmlformats.org/drawingml/2006/main">
-            <a:srgbClr val="2C6E73"/>
+            <a:srgbClr val="D9E0E6"/>
           </a:solidFill>
           <a:ln xmlns:a="http://schemas.openxmlformats.org/drawingml/2006/main" w="0">
-            <a:noFill/>
+            <a:solidFill>
+              <a:srgbClr val="D9E0E6"/>
+            </a:solidFill>
           </a:ln>
         </p:spPr>
       </p:sp>
@@ -8585,19 +8591,19 @@
           <p:cNvPr id="18" name="">
             <a:extLst xmlns:a="http://schemas.openxmlformats.org/drawingml/2006/main">
               <a:ext uri="{FF2B5EF4-FFF2-40B4-BE49-F238E27FC236}">
-                <a16:creationId xmlns:a16="http://schemas.microsoft.com/office/drawing/2014/main" id="{C32F2035-E8EF-4848-87F5-9EF07C6E4586}"/>
-              </a:ext>
-            </a:extLst>
-          </p:cNvPr>
-          <p:cNvSpPr>
-            <a:spLocks xmlns:a="http://schemas.openxmlformats.org/drawingml/2006/main" noGrp="1"/>
-          </p:cNvSpPr>
-          <p:nvPr/>
-        </p:nvSpPr>
-        <p:spPr>
-          <a:xfrm xmlns:a="http://schemas.openxmlformats.org/drawingml/2006/main">
-            <a:off x="1000125" y="3762375"/>
-            <a:ext cx="476250" cy="419100"/>
+                <a16:creationId xmlns:a16="http://schemas.microsoft.com/office/drawing/2014/main" id="{C2A0E649-3F85-4508-8920-ADAF2EE18322}"/>
+              </a:ext>
+            </a:extLst>
+          </p:cNvPr>
+          <p:cNvSpPr>
+            <a:spLocks xmlns:a="http://schemas.openxmlformats.org/drawingml/2006/main" noGrp="1"/>
+          </p:cNvSpPr>
+          <p:nvPr/>
+        </p:nvSpPr>
+        <p:spPr>
+          <a:xfrm xmlns:a="http://schemas.openxmlformats.org/drawingml/2006/main">
+            <a:off x="1162050" y="3952875"/>
+            <a:ext cx="400050" cy="400050"/>
           </a:xfrm>
           <a:prstGeom xmlns:a="http://schemas.openxmlformats.org/drawingml/2006/main" prst="rect">
             <a:avLst/>
@@ -8614,9 +8620,9 @@
           <a:lstStyle xmlns:a="http://schemas.openxmlformats.org/drawingml/2006/main"/>
           <a:p xmlns:a="http://schemas.openxmlformats.org/drawingml/2006/main">
             <a:pPr algn="ctr">
-              <a:defRPr sz="1350" b="1">
-                <a:solidFill>
-                  <a:srgbClr val="FFFFFF"/>
+              <a:defRPr sz="1125" b="1">
+                <a:solidFill>
+                  <a:srgbClr val="2C6E73"/>
                 </a:solidFill>
                 <a:latin typeface="Arial"/>
                 <a:ea typeface="Arial"/>
@@ -8624,9 +8630,9 @@
               </a:defRPr>
             </a:pPr>
             <a:r>
-              <a:rPr sz="1350" b="1">
-                <a:solidFill>
-                  <a:srgbClr val="FFFFFF"/>
+              <a:rPr sz="1125" b="1">
+                <a:solidFill>
+                  <a:srgbClr val="2C6E73"/>
                 </a:solidFill>
                 <a:latin typeface="Arial"/>
                 <a:ea typeface="Arial"/>
@@ -8642,19 +8648,19 @@
           <p:cNvPr id="19" name="">
             <a:extLst xmlns:a="http://schemas.openxmlformats.org/drawingml/2006/main">
               <a:ext uri="{FF2B5EF4-FFF2-40B4-BE49-F238E27FC236}">
-                <a16:creationId xmlns:a16="http://schemas.microsoft.com/office/drawing/2014/main" id="{3C44DC52-6B64-4775-9755-5EE372ECC24E}"/>
-              </a:ext>
-            </a:extLst>
-          </p:cNvPr>
-          <p:cNvSpPr>
-            <a:spLocks xmlns:a="http://schemas.openxmlformats.org/drawingml/2006/main" noGrp="1"/>
-          </p:cNvSpPr>
-          <p:nvPr/>
-        </p:nvSpPr>
-        <p:spPr>
-          <a:xfrm xmlns:a="http://schemas.openxmlformats.org/drawingml/2006/main">
-            <a:off x="1714500" y="3667125"/>
-            <a:ext cx="9429750" cy="609600"/>
+                <a16:creationId xmlns:a16="http://schemas.microsoft.com/office/drawing/2014/main" id="{018FC0CC-8D8D-45BB-85C0-0E32E0AA735F}"/>
+              </a:ext>
+            </a:extLst>
+          </p:cNvPr>
+          <p:cNvSpPr>
+            <a:spLocks xmlns:a="http://schemas.openxmlformats.org/drawingml/2006/main" noGrp="1"/>
+          </p:cNvSpPr>
+          <p:nvPr/>
+        </p:nvSpPr>
+        <p:spPr>
+          <a:xfrm xmlns:a="http://schemas.openxmlformats.org/drawingml/2006/main">
+            <a:off x="1714500" y="3867150"/>
+            <a:ext cx="9525000" cy="809625"/>
           </a:xfrm>
           <a:prstGeom xmlns:a="http://schemas.openxmlformats.org/drawingml/2006/main" prst="rect">
             <a:avLst/>
@@ -8671,7 +8677,7 @@
           <a:lstStyle xmlns:a="http://schemas.openxmlformats.org/drawingml/2006/main"/>
           <a:p xmlns:a="http://schemas.openxmlformats.org/drawingml/2006/main">
             <a:pPr algn="l">
-              <a:defRPr sz="1500" b="0">
+              <a:defRPr sz="1725" b="0">
                 <a:solidFill>
                   <a:srgbClr val="17253A"/>
                 </a:solidFill>
@@ -8681,7 +8687,7 @@
               </a:defRPr>
             </a:pPr>
             <a:r>
-              <a:rPr sz="1500" b="0">
+              <a:rPr sz="1725" b="0">
                 <a:solidFill>
                   <a:srgbClr val="17253A"/>
                 </a:solidFill>
@@ -8689,7 +8695,7 @@
                 <a:ea typeface="Arial"/>
                 <a:cs typeface="Arial"/>
               </a:rPr>
-              <a:t>Complete the calculation: 75 degrees.</a:t>
+              <a:t>Fourth angle = 360° - 285°</a:t>
             </a:r>
           </a:p>
         </p:txBody>
@@ -8699,28 +8705,30 @@
           <p:cNvPr id="20" name="">
             <a:extLst xmlns:a="http://schemas.openxmlformats.org/drawingml/2006/main">
               <a:ext uri="{FF2B5EF4-FFF2-40B4-BE49-F238E27FC236}">
-                <a16:creationId xmlns:a16="http://schemas.microsoft.com/office/drawing/2014/main" id="{E9CFEAD9-BFB9-44E9-83BF-B19DAE2020E0}"/>
-              </a:ext>
-            </a:extLst>
-          </p:cNvPr>
-          <p:cNvSpPr>
-            <a:spLocks xmlns:a="http://schemas.openxmlformats.org/drawingml/2006/main" noGrp="1"/>
-          </p:cNvSpPr>
-          <p:nvPr/>
-        </p:nvSpPr>
-        <p:spPr>
-          <a:xfrm xmlns:a="http://schemas.openxmlformats.org/drawingml/2006/main">
-            <a:off x="1000125" y="4476750"/>
-            <a:ext cx="476250" cy="476250"/>
-          </a:xfrm>
-          <a:prstGeom xmlns:a="http://schemas.openxmlformats.org/drawingml/2006/main" prst="ellipse">
+                <a16:creationId xmlns:a16="http://schemas.microsoft.com/office/drawing/2014/main" id="{3AE2D6D8-8B08-43DE-9EC2-E6F1466BA026}"/>
+              </a:ext>
+            </a:extLst>
+          </p:cNvPr>
+          <p:cNvSpPr>
+            <a:spLocks xmlns:a="http://schemas.openxmlformats.org/drawingml/2006/main" noGrp="1"/>
+          </p:cNvSpPr>
+          <p:nvPr/>
+        </p:nvSpPr>
+        <p:spPr>
+          <a:xfrm xmlns:a="http://schemas.openxmlformats.org/drawingml/2006/main">
+            <a:off x="1714500" y="4695825"/>
+            <a:ext cx="9334500" cy="9525"/>
+          </a:xfrm>
+          <a:prstGeom xmlns:a="http://schemas.openxmlformats.org/drawingml/2006/main" prst="rect">
             <a:avLst/>
           </a:prstGeom>
           <a:solidFill xmlns:a="http://schemas.openxmlformats.org/drawingml/2006/main">
-            <a:srgbClr val="2C6E73"/>
+            <a:srgbClr val="D9E0E6"/>
           </a:solidFill>
           <a:ln xmlns:a="http://schemas.openxmlformats.org/drawingml/2006/main" w="0">
-            <a:noFill/>
+            <a:solidFill>
+              <a:srgbClr val="D9E0E6"/>
+            </a:solidFill>
           </a:ln>
         </p:spPr>
       </p:sp>
@@ -8729,19 +8737,19 @@
           <p:cNvPr id="21" name="">
             <a:extLst xmlns:a="http://schemas.openxmlformats.org/drawingml/2006/main">
               <a:ext uri="{FF2B5EF4-FFF2-40B4-BE49-F238E27FC236}">
-                <a16:creationId xmlns:a16="http://schemas.microsoft.com/office/drawing/2014/main" id="{7F010B7E-79A0-4F5F-B4BA-AA8D6E274865}"/>
-              </a:ext>
-            </a:extLst>
-          </p:cNvPr>
-          <p:cNvSpPr>
-            <a:spLocks xmlns:a="http://schemas.openxmlformats.org/drawingml/2006/main" noGrp="1"/>
-          </p:cNvSpPr>
-          <p:nvPr/>
-        </p:nvSpPr>
-        <p:spPr>
-          <a:xfrm xmlns:a="http://schemas.openxmlformats.org/drawingml/2006/main">
-            <a:off x="1000125" y="4505325"/>
-            <a:ext cx="476250" cy="419100"/>
+                <a16:creationId xmlns:a16="http://schemas.microsoft.com/office/drawing/2014/main" id="{9B5448E3-0835-4E4D-B0EC-3DA508A4C97B}"/>
+              </a:ext>
+            </a:extLst>
+          </p:cNvPr>
+          <p:cNvSpPr>
+            <a:spLocks xmlns:a="http://schemas.openxmlformats.org/drawingml/2006/main" noGrp="1"/>
+          </p:cNvSpPr>
+          <p:nvPr/>
+        </p:nvSpPr>
+        <p:spPr>
+          <a:xfrm xmlns:a="http://schemas.openxmlformats.org/drawingml/2006/main">
+            <a:off x="1162050" y="4829175"/>
+            <a:ext cx="400050" cy="400050"/>
           </a:xfrm>
           <a:prstGeom xmlns:a="http://schemas.openxmlformats.org/drawingml/2006/main" prst="rect">
             <a:avLst/>
@@ -8758,9 +8766,9 @@
           <a:lstStyle xmlns:a="http://schemas.openxmlformats.org/drawingml/2006/main"/>
           <a:p xmlns:a="http://schemas.openxmlformats.org/drawingml/2006/main">
             <a:pPr algn="ctr">
-              <a:defRPr sz="1350" b="1">
-                <a:solidFill>
-                  <a:srgbClr val="FFFFFF"/>
+              <a:defRPr sz="1125" b="1">
+                <a:solidFill>
+                  <a:srgbClr val="2F785D"/>
                 </a:solidFill>
                 <a:latin typeface="Arial"/>
                 <a:ea typeface="Arial"/>
@@ -8768,9 +8776,9 @@
               </a:defRPr>
             </a:pPr>
             <a:r>
-              <a:rPr sz="1350" b="1">
-                <a:solidFill>
-                  <a:srgbClr val="FFFFFF"/>
+              <a:rPr sz="1125" b="1">
+                <a:solidFill>
+                  <a:srgbClr val="2F785D"/>
                 </a:solidFill>
                 <a:latin typeface="Arial"/>
                 <a:ea typeface="Arial"/>
@@ -8786,19 +8794,19 @@
           <p:cNvPr id="22" name="">
             <a:extLst xmlns:a="http://schemas.openxmlformats.org/drawingml/2006/main">
               <a:ext uri="{FF2B5EF4-FFF2-40B4-BE49-F238E27FC236}">
-                <a16:creationId xmlns:a16="http://schemas.microsoft.com/office/drawing/2014/main" id="{C0CA4B94-3CD3-4C3D-A1E0-FD287FFDA768}"/>
-              </a:ext>
-            </a:extLst>
-          </p:cNvPr>
-          <p:cNvSpPr>
-            <a:spLocks xmlns:a="http://schemas.openxmlformats.org/drawingml/2006/main" noGrp="1"/>
-          </p:cNvSpPr>
-          <p:nvPr/>
-        </p:nvSpPr>
-        <p:spPr>
-          <a:xfrm xmlns:a="http://schemas.openxmlformats.org/drawingml/2006/main">
-            <a:off x="1714500" y="4410075"/>
-            <a:ext cx="9429750" cy="609600"/>
+                <a16:creationId xmlns:a16="http://schemas.microsoft.com/office/drawing/2014/main" id="{1812187F-7C6E-40A4-98E3-496934B03DC5}"/>
+              </a:ext>
+            </a:extLst>
+          </p:cNvPr>
+          <p:cNvSpPr>
+            <a:spLocks xmlns:a="http://schemas.openxmlformats.org/drawingml/2006/main" noGrp="1"/>
+          </p:cNvSpPr>
+          <p:nvPr/>
+        </p:nvSpPr>
+        <p:spPr>
+          <a:xfrm xmlns:a="http://schemas.openxmlformats.org/drawingml/2006/main">
+            <a:off x="1714500" y="4743450"/>
+            <a:ext cx="9525000" cy="809625"/>
           </a:xfrm>
           <a:prstGeom xmlns:a="http://schemas.openxmlformats.org/drawingml/2006/main" prst="rect">
             <a:avLst/>
@@ -8815,7 +8823,7 @@
           <a:lstStyle xmlns:a="http://schemas.openxmlformats.org/drawingml/2006/main"/>
           <a:p xmlns:a="http://schemas.openxmlformats.org/drawingml/2006/main">
             <a:pPr algn="l">
-              <a:defRPr sz="1500" b="1">
+              <a:defRPr sz="1725" b="1">
                 <a:solidFill>
                   <a:srgbClr val="2F785D"/>
                 </a:solidFill>
@@ -8825,7 +8833,7 @@
               </a:defRPr>
             </a:pPr>
             <a:r>
-              <a:rPr sz="1500" b="1">
+              <a:rPr sz="1725" b="1">
                 <a:solidFill>
                   <a:srgbClr val="2F785D"/>
                 </a:solidFill>
@@ -8833,7 +8841,7 @@
                 <a:ea typeface="Arial"/>
                 <a:cs typeface="Arial"/>
               </a:rPr>
-              <a:t>Check the result: Check the angle size and label it with degrees.</a:t>
+              <a:t>75°</a:t>
             </a:r>
           </a:p>
         </p:txBody>
@@ -8841,7 +8849,7 @@
     </p:spTree>
     <p:extLst>
       <p:ext uri="{BB962C8B-B14F-4D97-AF65-F5344CB8AC3E}">
-        <p14:creationId xmlns:p14="http://schemas.microsoft.com/office/powerpoint/2010/main" val="527771033"/>
+        <p14:creationId xmlns:p14="http://schemas.microsoft.com/office/powerpoint/2010/main" val="1003703141"/>
       </p:ext>
     </p:extLst>
   </p:cSld>
@@ -9134,7 +9142,7 @@
           <p:cNvPr id="15" name="">
             <a:extLst xmlns:a="http://schemas.openxmlformats.org/drawingml/2006/main">
               <a:ext uri="{FF2B5EF4-FFF2-40B4-BE49-F238E27FC236}">
-                <a16:creationId xmlns:a16="http://schemas.microsoft.com/office/drawing/2014/main" id="{FBA06926-9A60-400A-A0DD-F00709C17591}"/>
+                <a16:creationId xmlns:a16="http://schemas.microsoft.com/office/drawing/2014/main" id="{1DD39121-173F-4B1B-A9C7-7CEA513EA99F}"/>
               </a:ext>
             </a:extLst>
           </p:cNvPr>
@@ -9166,7 +9174,7 @@
           <p:cNvPr id="2" name="">
             <a:extLst xmlns:a="http://schemas.openxmlformats.org/drawingml/2006/main">
               <a:ext uri="{FF2B5EF4-FFF2-40B4-BE49-F238E27FC236}">
-                <a16:creationId xmlns:a16="http://schemas.microsoft.com/office/drawing/2014/main" id="{B944D213-E0FF-4366-A28C-11BA8C0D5BD6}"/>
+                <a16:creationId xmlns:a16="http://schemas.microsoft.com/office/drawing/2014/main" id="{934A9203-2EDA-4841-A91E-2EF81A9DAEBA}"/>
               </a:ext>
             </a:extLst>
           </p:cNvPr>
@@ -9223,7 +9231,7 @@
           <p:cNvPr id="3" name="">
             <a:extLst xmlns:a="http://schemas.openxmlformats.org/drawingml/2006/main">
               <a:ext uri="{FF2B5EF4-FFF2-40B4-BE49-F238E27FC236}">
-                <a16:creationId xmlns:a16="http://schemas.microsoft.com/office/drawing/2014/main" id="{CE297B67-0B8E-47B4-910C-897B10341E95}"/>
+                <a16:creationId xmlns:a16="http://schemas.microsoft.com/office/drawing/2014/main" id="{308584C5-8514-4CA5-81EC-573A5366C28B}"/>
               </a:ext>
             </a:extLst>
           </p:cNvPr>
@@ -9255,7 +9263,7 @@
           <p:cNvPr id="4" name="">
             <a:extLst xmlns:a="http://schemas.openxmlformats.org/drawingml/2006/main">
               <a:ext uri="{FF2B5EF4-FFF2-40B4-BE49-F238E27FC236}">
-                <a16:creationId xmlns:a16="http://schemas.microsoft.com/office/drawing/2014/main" id="{66F0A45E-338A-4B53-ACBB-6385873756E1}"/>
+                <a16:creationId xmlns:a16="http://schemas.microsoft.com/office/drawing/2014/main" id="{39B52443-315B-4076-AEDD-C5E2D164971E}"/>
               </a:ext>
             </a:extLst>
           </p:cNvPr>
@@ -9312,7 +9320,7 @@
           <p:cNvPr id="5" name="">
             <a:extLst xmlns:a="http://schemas.openxmlformats.org/drawingml/2006/main">
               <a:ext uri="{FF2B5EF4-FFF2-40B4-BE49-F238E27FC236}">
-                <a16:creationId xmlns:a16="http://schemas.microsoft.com/office/drawing/2014/main" id="{20CC2D69-74FD-43D3-8569-3F539932382F}"/>
+                <a16:creationId xmlns:a16="http://schemas.microsoft.com/office/drawing/2014/main" id="{8B455491-7720-4E4A-AE44-5586AE730B6B}"/>
               </a:ext>
             </a:extLst>
           </p:cNvPr>
@@ -9369,7 +9377,7 @@
           <p:cNvPr id="6" name="">
             <a:extLst xmlns:a="http://schemas.openxmlformats.org/drawingml/2006/main">
               <a:ext uri="{FF2B5EF4-FFF2-40B4-BE49-F238E27FC236}">
-                <a16:creationId xmlns:a16="http://schemas.microsoft.com/office/drawing/2014/main" id="{48A980B6-1205-4198-9F08-41DAED90EF11}"/>
+                <a16:creationId xmlns:a16="http://schemas.microsoft.com/office/drawing/2014/main" id="{1A035454-CC2D-4355-A9AE-AA5F7BBE865D}"/>
               </a:ext>
             </a:extLst>
           </p:cNvPr>
@@ -9426,7 +9434,7 @@
           <p:cNvPr id="7" name="">
             <a:extLst xmlns:a="http://schemas.openxmlformats.org/drawingml/2006/main">
               <a:ext uri="{FF2B5EF4-FFF2-40B4-BE49-F238E27FC236}">
-                <a16:creationId xmlns:a16="http://schemas.microsoft.com/office/drawing/2014/main" id="{73A08638-B640-40A2-9A4F-0BC8B0BF1E91}"/>
+                <a16:creationId xmlns:a16="http://schemas.microsoft.com/office/drawing/2014/main" id="{86F217E6-B393-47B6-9721-3B1719CCD299}"/>
               </a:ext>
             </a:extLst>
           </p:cNvPr>
@@ -9458,7 +9466,7 @@
           <p:cNvPr id="8" name="">
             <a:extLst xmlns:a="http://schemas.openxmlformats.org/drawingml/2006/main">
               <a:ext uri="{FF2B5EF4-FFF2-40B4-BE49-F238E27FC236}">
-                <a16:creationId xmlns:a16="http://schemas.microsoft.com/office/drawing/2014/main" id="{175C2DF4-F98C-441A-8D6A-6DEE3F8C9E2A}"/>
+                <a16:creationId xmlns:a16="http://schemas.microsoft.com/office/drawing/2014/main" id="{43E164FD-95F4-45C0-A6EA-FF3177235244}"/>
               </a:ext>
             </a:extLst>
           </p:cNvPr>
@@ -9515,7 +9523,7 @@
           <p:cNvPr id="9" name="">
             <a:extLst xmlns:a="http://schemas.openxmlformats.org/drawingml/2006/main">
               <a:ext uri="{FF2B5EF4-FFF2-40B4-BE49-F238E27FC236}">
-                <a16:creationId xmlns:a16="http://schemas.microsoft.com/office/drawing/2014/main" id="{75820703-5A4F-468F-B4BF-8CE7ECF8DB7D}"/>
+                <a16:creationId xmlns:a16="http://schemas.microsoft.com/office/drawing/2014/main" id="{761A0E6E-9F75-458C-BCD5-DF37939D9DF2}"/>
               </a:ext>
             </a:extLst>
           </p:cNvPr>
@@ -9572,7 +9580,7 @@
           <p:cNvPr id="10" name="">
             <a:extLst xmlns:a="http://schemas.openxmlformats.org/drawingml/2006/main">
               <a:ext uri="{FF2B5EF4-FFF2-40B4-BE49-F238E27FC236}">
-                <a16:creationId xmlns:a16="http://schemas.microsoft.com/office/drawing/2014/main" id="{0ED4D5AF-F956-4DFB-88B3-C97160703704}"/>
+                <a16:creationId xmlns:a16="http://schemas.microsoft.com/office/drawing/2014/main" id="{E193A706-A458-41EF-9959-41E8F060ED9F}"/>
               </a:ext>
             </a:extLst>
           </p:cNvPr>
@@ -9629,7 +9637,7 @@
           <p:cNvPr id="11" name="">
             <a:extLst xmlns:a="http://schemas.openxmlformats.org/drawingml/2006/main">
               <a:ext uri="{FF2B5EF4-FFF2-40B4-BE49-F238E27FC236}">
-                <a16:creationId xmlns:a16="http://schemas.microsoft.com/office/drawing/2014/main" id="{3CCF5C19-1B77-4250-BB6C-633C9201C9E8}"/>
+                <a16:creationId xmlns:a16="http://schemas.microsoft.com/office/drawing/2014/main" id="{7A89D823-3F9C-4D6D-A46E-A3DB10C49EE0}"/>
               </a:ext>
             </a:extLst>
           </p:cNvPr>
@@ -9686,7 +9694,7 @@
           <p:cNvPr id="12" name="">
             <a:extLst xmlns:a="http://schemas.openxmlformats.org/drawingml/2006/main">
               <a:ext uri="{FF2B5EF4-FFF2-40B4-BE49-F238E27FC236}">
-                <a16:creationId xmlns:a16="http://schemas.microsoft.com/office/drawing/2014/main" id="{315D49B3-8AAF-4175-A02F-A58A18CD7FE1}"/>
+                <a16:creationId xmlns:a16="http://schemas.microsoft.com/office/drawing/2014/main" id="{EEA5E0BB-87AB-4946-96B6-A27D2325E0A3}"/>
               </a:ext>
             </a:extLst>
           </p:cNvPr>
@@ -9718,7 +9726,7 @@
           <p:cNvPr id="13" name="">
             <a:extLst xmlns:a="http://schemas.openxmlformats.org/drawingml/2006/main">
               <a:ext uri="{FF2B5EF4-FFF2-40B4-BE49-F238E27FC236}">
-                <a16:creationId xmlns:a16="http://schemas.microsoft.com/office/drawing/2014/main" id="{AC02BF4D-01AE-4BAD-B040-F203FDFD14AE}"/>
+                <a16:creationId xmlns:a16="http://schemas.microsoft.com/office/drawing/2014/main" id="{53DAD701-1F01-42D7-BC44-D97965888BE5}"/>
               </a:ext>
             </a:extLst>
           </p:cNvPr>
@@ -9775,7 +9783,7 @@
           <p:cNvPr id="14" name="">
             <a:extLst xmlns:a="http://schemas.openxmlformats.org/drawingml/2006/main">
               <a:ext uri="{FF2B5EF4-FFF2-40B4-BE49-F238E27FC236}">
-                <a16:creationId xmlns:a16="http://schemas.microsoft.com/office/drawing/2014/main" id="{49F9E4C6-A9F9-45CC-9743-89B0225566B5}"/>
+                <a16:creationId xmlns:a16="http://schemas.microsoft.com/office/drawing/2014/main" id="{6AD4793A-C1A0-4AE5-A876-826316D0DE0C}"/>
               </a:ext>
             </a:extLst>
           </p:cNvPr>
@@ -9830,7 +9838,7 @@
     </p:spTree>
     <p:extLst>
       <p:ext uri="{BB962C8B-B14F-4D97-AF65-F5344CB8AC3E}">
-        <p14:creationId xmlns:p14="http://schemas.microsoft.com/office/powerpoint/2010/main" val="903426668"/>
+        <p14:creationId xmlns:p14="http://schemas.microsoft.com/office/powerpoint/2010/main" val="444385783"/>
       </p:ext>
     </p:extLst>
   </p:cSld>
@@ -10031,7 +10039,7 @@
           <p:cNvPr id="16" name="">
             <a:extLst xmlns:a="http://schemas.openxmlformats.org/drawingml/2006/main">
               <a:ext uri="{FF2B5EF4-FFF2-40B4-BE49-F238E27FC236}">
-                <a16:creationId xmlns:a16="http://schemas.microsoft.com/office/drawing/2014/main" id="{AFA2E015-DE70-44FF-A239-DAA12473B0A0}"/>
+                <a16:creationId xmlns:a16="http://schemas.microsoft.com/office/drawing/2014/main" id="{9BA4E9D5-7444-41F8-8BAE-2C450DAACF94}"/>
               </a:ext>
             </a:extLst>
           </p:cNvPr>
@@ -10063,7 +10071,7 @@
           <p:cNvPr id="2" name="">
             <a:extLst xmlns:a="http://schemas.openxmlformats.org/drawingml/2006/main">
               <a:ext uri="{FF2B5EF4-FFF2-40B4-BE49-F238E27FC236}">
-                <a16:creationId xmlns:a16="http://schemas.microsoft.com/office/drawing/2014/main" id="{A10D3DF1-3F1B-441E-8DE5-12EA2D46868B}"/>
+                <a16:creationId xmlns:a16="http://schemas.microsoft.com/office/drawing/2014/main" id="{E7DF4B2F-64C5-48A8-A9CB-DDF94A6797A9}"/>
               </a:ext>
             </a:extLst>
           </p:cNvPr>
@@ -10120,7 +10128,7 @@
           <p:cNvPr id="3" name="">
             <a:extLst xmlns:a="http://schemas.openxmlformats.org/drawingml/2006/main">
               <a:ext uri="{FF2B5EF4-FFF2-40B4-BE49-F238E27FC236}">
-                <a16:creationId xmlns:a16="http://schemas.microsoft.com/office/drawing/2014/main" id="{9DB87A44-4C3B-4FF9-B4CC-900A9B953887}"/>
+                <a16:creationId xmlns:a16="http://schemas.microsoft.com/office/drawing/2014/main" id="{ED63E084-2A8A-4047-88A1-42AD4AA3F6C7}"/>
               </a:ext>
             </a:extLst>
           </p:cNvPr>
@@ -10152,7 +10160,7 @@
           <p:cNvPr id="4" name="">
             <a:extLst xmlns:a="http://schemas.openxmlformats.org/drawingml/2006/main">
               <a:ext uri="{FF2B5EF4-FFF2-40B4-BE49-F238E27FC236}">
-                <a16:creationId xmlns:a16="http://schemas.microsoft.com/office/drawing/2014/main" id="{D11ACDAE-4766-461E-8466-8ABE78F2E067}"/>
+                <a16:creationId xmlns:a16="http://schemas.microsoft.com/office/drawing/2014/main" id="{2F3F3ADD-F605-412F-BD00-2851E1591EBB}"/>
               </a:ext>
             </a:extLst>
           </p:cNvPr>
@@ -10209,7 +10217,7 @@
           <p:cNvPr id="5" name="">
             <a:extLst xmlns:a="http://schemas.openxmlformats.org/drawingml/2006/main">
               <a:ext uri="{FF2B5EF4-FFF2-40B4-BE49-F238E27FC236}">
-                <a16:creationId xmlns:a16="http://schemas.microsoft.com/office/drawing/2014/main" id="{9AF7C148-BF9D-4E2A-B482-9172A111A773}"/>
+                <a16:creationId xmlns:a16="http://schemas.microsoft.com/office/drawing/2014/main" id="{E7FDFB4E-BFF3-455E-9182-F392D4218160}"/>
               </a:ext>
             </a:extLst>
           </p:cNvPr>
@@ -10266,7 +10274,7 @@
           <p:cNvPr id="6" name="">
             <a:extLst xmlns:a="http://schemas.openxmlformats.org/drawingml/2006/main">
               <a:ext uri="{FF2B5EF4-FFF2-40B4-BE49-F238E27FC236}">
-                <a16:creationId xmlns:a16="http://schemas.microsoft.com/office/drawing/2014/main" id="{340EB28F-39C1-4226-90A3-10DA91ABB94B}"/>
+                <a16:creationId xmlns:a16="http://schemas.microsoft.com/office/drawing/2014/main" id="{F4F11171-6824-4730-8DB0-9B28D482C582}"/>
               </a:ext>
             </a:extLst>
           </p:cNvPr>
@@ -10323,7 +10331,7 @@
           <p:cNvPr id="7" name="">
             <a:extLst xmlns:a="http://schemas.openxmlformats.org/drawingml/2006/main">
               <a:ext uri="{FF2B5EF4-FFF2-40B4-BE49-F238E27FC236}">
-                <a16:creationId xmlns:a16="http://schemas.microsoft.com/office/drawing/2014/main" id="{09AD1A2D-D969-4193-A95E-E716E712AC7B}"/>
+                <a16:creationId xmlns:a16="http://schemas.microsoft.com/office/drawing/2014/main" id="{CE15E089-44D2-4943-B8D8-D7610933E94B}"/>
               </a:ext>
             </a:extLst>
           </p:cNvPr>
@@ -10355,7 +10363,7 @@
           <p:cNvPr id="8" name="">
             <a:extLst xmlns:a="http://schemas.openxmlformats.org/drawingml/2006/main">
               <a:ext uri="{FF2B5EF4-FFF2-40B4-BE49-F238E27FC236}">
-                <a16:creationId xmlns:a16="http://schemas.microsoft.com/office/drawing/2014/main" id="{2860F8D7-C2E8-410C-96FC-0B3ACFEB2435}"/>
+                <a16:creationId xmlns:a16="http://schemas.microsoft.com/office/drawing/2014/main" id="{F40827F6-C0EA-4E65-9CD0-75791C0002D9}"/>
               </a:ext>
             </a:extLst>
           </p:cNvPr>
@@ -10412,7 +10420,7 @@
           <p:cNvPr id="9" name="">
             <a:extLst xmlns:a="http://schemas.openxmlformats.org/drawingml/2006/main">
               <a:ext uri="{FF2B5EF4-FFF2-40B4-BE49-F238E27FC236}">
-                <a16:creationId xmlns:a16="http://schemas.microsoft.com/office/drawing/2014/main" id="{89F6AC9D-A9AD-432B-9370-76ABEFEDE3C1}"/>
+                <a16:creationId xmlns:a16="http://schemas.microsoft.com/office/drawing/2014/main" id="{2DCC7B31-7B72-46EE-B9EF-6D45FC7F2B68}"/>
               </a:ext>
             </a:extLst>
           </p:cNvPr>
@@ -10469,7 +10477,7 @@
           <p:cNvPr id="10" name="">
             <a:extLst xmlns:a="http://schemas.openxmlformats.org/drawingml/2006/main">
               <a:ext uri="{FF2B5EF4-FFF2-40B4-BE49-F238E27FC236}">
-                <a16:creationId xmlns:a16="http://schemas.microsoft.com/office/drawing/2014/main" id="{80FAC092-04EF-48F8-98EE-5EB998D066C8}"/>
+                <a16:creationId xmlns:a16="http://schemas.microsoft.com/office/drawing/2014/main" id="{9CDA4A8C-5865-459B-8A08-B5258278FE8C}"/>
               </a:ext>
             </a:extLst>
           </p:cNvPr>
@@ -10526,7 +10534,7 @@
           <p:cNvPr id="11" name="">
             <a:extLst xmlns:a="http://schemas.openxmlformats.org/drawingml/2006/main">
               <a:ext uri="{FF2B5EF4-FFF2-40B4-BE49-F238E27FC236}">
-                <a16:creationId xmlns:a16="http://schemas.microsoft.com/office/drawing/2014/main" id="{3DA5C4F2-C1E9-49C6-AC82-0C3B4F0BB8EC}"/>
+                <a16:creationId xmlns:a16="http://schemas.microsoft.com/office/drawing/2014/main" id="{8D8419B3-7D24-406A-BDC1-9146863E3AB2}"/>
               </a:ext>
             </a:extLst>
           </p:cNvPr>
@@ -10583,7 +10591,7 @@
           <p:cNvPr id="12" name="">
             <a:extLst xmlns:a="http://schemas.openxmlformats.org/drawingml/2006/main">
               <a:ext uri="{FF2B5EF4-FFF2-40B4-BE49-F238E27FC236}">
-                <a16:creationId xmlns:a16="http://schemas.microsoft.com/office/drawing/2014/main" id="{BC42B5CB-7C92-4996-B8AF-8B7C8EB9E3CD}"/>
+                <a16:creationId xmlns:a16="http://schemas.microsoft.com/office/drawing/2014/main" id="{FF71FB9C-98DD-46A3-8A53-0CE6D2920D5C}"/>
               </a:ext>
             </a:extLst>
           </p:cNvPr>
@@ -10640,7 +10648,7 @@
           <p:cNvPr id="13" name="">
             <a:extLst xmlns:a="http://schemas.openxmlformats.org/drawingml/2006/main">
               <a:ext uri="{FF2B5EF4-FFF2-40B4-BE49-F238E27FC236}">
-                <a16:creationId xmlns:a16="http://schemas.microsoft.com/office/drawing/2014/main" id="{F2B8065D-D567-4160-8D07-39B72FB1A92E}"/>
+                <a16:creationId xmlns:a16="http://schemas.microsoft.com/office/drawing/2014/main" id="{6A23E9A4-6925-4836-AE55-72A93E0AEA60}"/>
               </a:ext>
             </a:extLst>
           </p:cNvPr>
@@ -10697,7 +10705,7 @@
           <p:cNvPr id="14" name="">
             <a:extLst xmlns:a="http://schemas.openxmlformats.org/drawingml/2006/main">
               <a:ext uri="{FF2B5EF4-FFF2-40B4-BE49-F238E27FC236}">
-                <a16:creationId xmlns:a16="http://schemas.microsoft.com/office/drawing/2014/main" id="{3AC817C9-4BF2-4F88-807C-591E4943BDB7}"/>
+                <a16:creationId xmlns:a16="http://schemas.microsoft.com/office/drawing/2014/main" id="{801FF1FF-DBA4-46E6-ABA1-D344701539EA}"/>
               </a:ext>
             </a:extLst>
           </p:cNvPr>
@@ -10754,7 +10762,7 @@
           <p:cNvPr id="15" name="">
             <a:extLst xmlns:a="http://schemas.openxmlformats.org/drawingml/2006/main">
               <a:ext uri="{FF2B5EF4-FFF2-40B4-BE49-F238E27FC236}">
-                <a16:creationId xmlns:a16="http://schemas.microsoft.com/office/drawing/2014/main" id="{DE27607A-5ACB-4818-8810-F6883DE6DF5B}"/>
+                <a16:creationId xmlns:a16="http://schemas.microsoft.com/office/drawing/2014/main" id="{BC3819F9-7B95-4FD0-A4FA-92B5639D9B62}"/>
               </a:ext>
             </a:extLst>
           </p:cNvPr>
@@ -10809,7 +10817,7 @@
     </p:spTree>
     <p:extLst>
       <p:ext uri="{BB962C8B-B14F-4D97-AF65-F5344CB8AC3E}">
-        <p14:creationId xmlns:p14="http://schemas.microsoft.com/office/powerpoint/2010/main" val="1556026347"/>
+        <p14:creationId xmlns:p14="http://schemas.microsoft.com/office/powerpoint/2010/main" val="515950974"/>
       </p:ext>
     </p:extLst>
   </p:cSld>
@@ -10964,7 +10972,7 @@
           <p:cNvPr id="16" name="">
             <a:extLst xmlns:a="http://schemas.openxmlformats.org/drawingml/2006/main">
               <a:ext uri="{FF2B5EF4-FFF2-40B4-BE49-F238E27FC236}">
-                <a16:creationId xmlns:a16="http://schemas.microsoft.com/office/drawing/2014/main" id="{2F6548FB-2C0E-4113-AEBE-BCB39CDA136E}"/>
+                <a16:creationId xmlns:a16="http://schemas.microsoft.com/office/drawing/2014/main" id="{157347A1-A3CF-445C-93AA-046C367971E4}"/>
               </a:ext>
             </a:extLst>
           </p:cNvPr>
@@ -10996,7 +11004,7 @@
           <p:cNvPr id="2" name="">
             <a:extLst xmlns:a="http://schemas.openxmlformats.org/drawingml/2006/main">
               <a:ext uri="{FF2B5EF4-FFF2-40B4-BE49-F238E27FC236}">
-                <a16:creationId xmlns:a16="http://schemas.microsoft.com/office/drawing/2014/main" id="{E796B87D-E139-40AA-A4F9-34C261B8691F}"/>
+                <a16:creationId xmlns:a16="http://schemas.microsoft.com/office/drawing/2014/main" id="{848E6EB7-80C3-4B6F-AB71-02D962E78C3F}"/>
               </a:ext>
             </a:extLst>
           </p:cNvPr>
@@ -11053,7 +11061,7 @@
           <p:cNvPr id="3" name="">
             <a:extLst xmlns:a="http://schemas.openxmlformats.org/drawingml/2006/main">
               <a:ext uri="{FF2B5EF4-FFF2-40B4-BE49-F238E27FC236}">
-                <a16:creationId xmlns:a16="http://schemas.microsoft.com/office/drawing/2014/main" id="{3A0FCDCA-BF09-405E-BE46-EE612B50FD4C}"/>
+                <a16:creationId xmlns:a16="http://schemas.microsoft.com/office/drawing/2014/main" id="{E1ADC032-882D-47BA-AD9F-3B3C92386B34}"/>
               </a:ext>
             </a:extLst>
           </p:cNvPr>
@@ -11085,7 +11093,7 @@
           <p:cNvPr id="4" name="">
             <a:extLst xmlns:a="http://schemas.openxmlformats.org/drawingml/2006/main">
               <a:ext uri="{FF2B5EF4-FFF2-40B4-BE49-F238E27FC236}">
-                <a16:creationId xmlns:a16="http://schemas.microsoft.com/office/drawing/2014/main" id="{93174C39-CDF1-460D-AA6E-FB45BD4D4C65}"/>
+                <a16:creationId xmlns:a16="http://schemas.microsoft.com/office/drawing/2014/main" id="{25FEBF76-2B04-47B1-A4F1-D1BE2BBE4665}"/>
               </a:ext>
             </a:extLst>
           </p:cNvPr>
@@ -11142,7 +11150,7 @@
           <p:cNvPr id="5" name="">
             <a:extLst xmlns:a="http://schemas.openxmlformats.org/drawingml/2006/main">
               <a:ext uri="{FF2B5EF4-FFF2-40B4-BE49-F238E27FC236}">
-                <a16:creationId xmlns:a16="http://schemas.microsoft.com/office/drawing/2014/main" id="{2FD4499E-9594-4029-A44E-F2F160E67E6E}"/>
+                <a16:creationId xmlns:a16="http://schemas.microsoft.com/office/drawing/2014/main" id="{354853E9-514F-4930-9F77-C9F28112F0A3}"/>
               </a:ext>
             </a:extLst>
           </p:cNvPr>
@@ -11199,7 +11207,7 @@
           <p:cNvPr id="6" name="">
             <a:extLst xmlns:a="http://schemas.openxmlformats.org/drawingml/2006/main">
               <a:ext uri="{FF2B5EF4-FFF2-40B4-BE49-F238E27FC236}">
-                <a16:creationId xmlns:a16="http://schemas.microsoft.com/office/drawing/2014/main" id="{3C4AE880-07D8-447E-AF6A-4B8AB1E87492}"/>
+                <a16:creationId xmlns:a16="http://schemas.microsoft.com/office/drawing/2014/main" id="{4F1978E6-CA2E-4B2B-90F6-B73E6907BAA2}"/>
               </a:ext>
             </a:extLst>
           </p:cNvPr>
@@ -11256,7 +11264,7 @@
           <p:cNvPr id="7" name="">
             <a:extLst xmlns:a="http://schemas.openxmlformats.org/drawingml/2006/main">
               <a:ext uri="{FF2B5EF4-FFF2-40B4-BE49-F238E27FC236}">
-                <a16:creationId xmlns:a16="http://schemas.microsoft.com/office/drawing/2014/main" id="{FC8D7DB5-368B-48D9-A1CB-241BD028FB3F}"/>
+                <a16:creationId xmlns:a16="http://schemas.microsoft.com/office/drawing/2014/main" id="{FAFE3612-6FA5-4C7D-93E9-48CE5BA0FE94}"/>
               </a:ext>
             </a:extLst>
           </p:cNvPr>
@@ -11288,7 +11296,7 @@
           <p:cNvPr id="8" name="">
             <a:extLst xmlns:a="http://schemas.openxmlformats.org/drawingml/2006/main">
               <a:ext uri="{FF2B5EF4-FFF2-40B4-BE49-F238E27FC236}">
-                <a16:creationId xmlns:a16="http://schemas.microsoft.com/office/drawing/2014/main" id="{22B24525-8B08-495B-8087-F0A444058339}"/>
+                <a16:creationId xmlns:a16="http://schemas.microsoft.com/office/drawing/2014/main" id="{D39688BB-B948-42F0-808E-1BA9943A413D}"/>
               </a:ext>
             </a:extLst>
           </p:cNvPr>
@@ -11345,7 +11353,7 @@
           <p:cNvPr id="9" name="">
             <a:extLst xmlns:a="http://schemas.openxmlformats.org/drawingml/2006/main">
               <a:ext uri="{FF2B5EF4-FFF2-40B4-BE49-F238E27FC236}">
-                <a16:creationId xmlns:a16="http://schemas.microsoft.com/office/drawing/2014/main" id="{31AFDA8E-30E1-4D97-B747-2EFD5DF1BCE4}"/>
+                <a16:creationId xmlns:a16="http://schemas.microsoft.com/office/drawing/2014/main" id="{3A762668-D57E-467B-B26A-57C5FF113057}"/>
               </a:ext>
             </a:extLst>
           </p:cNvPr>
@@ -11406,7 +11414,7 @@
           <p:nvPr/>
         </p:nvPicPr>
         <p:blipFill>
-          <a:blip xmlns:r="http://schemas.openxmlformats.org/officeDocument/2006/relationships" xmlns:a="http://schemas.openxmlformats.org/drawingml/2006/main" r:embed="Ra2cd856424be40ae"/>
+          <a:blip xmlns:r="http://schemas.openxmlformats.org/officeDocument/2006/relationships" xmlns:a="http://schemas.openxmlformats.org/drawingml/2006/main" r:embed="Ra027d60bafd145fb"/>
           <a:stretch xmlns:a="http://schemas.openxmlformats.org/drawingml/2006/main"/>
         </p:blipFill>
         <p:spPr>
@@ -11424,7 +11432,7 @@
           <p:cNvPr id="11" name="">
             <a:extLst xmlns:a="http://schemas.openxmlformats.org/drawingml/2006/main">
               <a:ext uri="{FF2B5EF4-FFF2-40B4-BE49-F238E27FC236}">
-                <a16:creationId xmlns:a16="http://schemas.microsoft.com/office/drawing/2014/main" id="{5446D2BA-4F85-47BC-8E1B-2432620CC530}"/>
+                <a16:creationId xmlns:a16="http://schemas.microsoft.com/office/drawing/2014/main" id="{AA5AB3EA-5379-44FA-BA8A-44A886A5115F}"/>
               </a:ext>
             </a:extLst>
           </p:cNvPr>
@@ -11481,7 +11489,7 @@
           <p:cNvPr id="12" name="">
             <a:extLst xmlns:a="http://schemas.openxmlformats.org/drawingml/2006/main">
               <a:ext uri="{FF2B5EF4-FFF2-40B4-BE49-F238E27FC236}">
-                <a16:creationId xmlns:a16="http://schemas.microsoft.com/office/drawing/2014/main" id="{FA0A6B1E-CC2E-4358-ADD0-8C745BF2B9C5}"/>
+                <a16:creationId xmlns:a16="http://schemas.microsoft.com/office/drawing/2014/main" id="{B1E82FB1-8B23-4C64-A897-7817D6548D8B}"/>
               </a:ext>
             </a:extLst>
           </p:cNvPr>
@@ -11538,7 +11546,7 @@
           <p:cNvPr id="13" name="">
             <a:extLst xmlns:a="http://schemas.openxmlformats.org/drawingml/2006/main">
               <a:ext uri="{FF2B5EF4-FFF2-40B4-BE49-F238E27FC236}">
-                <a16:creationId xmlns:a16="http://schemas.microsoft.com/office/drawing/2014/main" id="{3E3AE051-D538-4B94-B151-C2D3477E4CFB}"/>
+                <a16:creationId xmlns:a16="http://schemas.microsoft.com/office/drawing/2014/main" id="{B8CA6ECA-E451-4674-93CD-D717D0D67491}"/>
               </a:ext>
             </a:extLst>
           </p:cNvPr>
@@ -11570,7 +11578,7 @@
           <p:cNvPr id="14" name="">
             <a:extLst xmlns:a="http://schemas.openxmlformats.org/drawingml/2006/main">
               <a:ext uri="{FF2B5EF4-FFF2-40B4-BE49-F238E27FC236}">
-                <a16:creationId xmlns:a16="http://schemas.microsoft.com/office/drawing/2014/main" id="{5BEA039E-FCD7-4839-A776-C0C941C9F905}"/>
+                <a16:creationId xmlns:a16="http://schemas.microsoft.com/office/drawing/2014/main" id="{65DD90D5-AD4B-4597-B13D-2173FDC53251}"/>
               </a:ext>
             </a:extLst>
           </p:cNvPr>
@@ -11627,7 +11635,7 @@
           <p:cNvPr id="15" name="">
             <a:extLst xmlns:a="http://schemas.openxmlformats.org/drawingml/2006/main">
               <a:ext uri="{FF2B5EF4-FFF2-40B4-BE49-F238E27FC236}">
-                <a16:creationId xmlns:a16="http://schemas.microsoft.com/office/drawing/2014/main" id="{24EC48F9-9E44-47FB-8038-7B45785BAD4C}"/>
+                <a16:creationId xmlns:a16="http://schemas.microsoft.com/office/drawing/2014/main" id="{357B03FA-AB47-41EC-8ED1-94FED6D84A8A}"/>
               </a:ext>
             </a:extLst>
           </p:cNvPr>
@@ -11682,7 +11690,7 @@
     </p:spTree>
     <p:extLst>
       <p:ext uri="{BB962C8B-B14F-4D97-AF65-F5344CB8AC3E}">
-        <p14:creationId xmlns:p14="http://schemas.microsoft.com/office/powerpoint/2010/main" val="1810865412"/>
+        <p14:creationId xmlns:p14="http://schemas.microsoft.com/office/powerpoint/2010/main" val="542595145"/>
       </p:ext>
     </p:extLst>
   </p:cSld>
@@ -11837,7 +11845,7 @@
           <p:cNvPr id="23" name="">
             <a:extLst xmlns:a="http://schemas.openxmlformats.org/drawingml/2006/main">
               <a:ext uri="{FF2B5EF4-FFF2-40B4-BE49-F238E27FC236}">
-                <a16:creationId xmlns:a16="http://schemas.microsoft.com/office/drawing/2014/main" id="{F5ABC0A8-2E20-4958-A2A1-63D061AA5B2D}"/>
+                <a16:creationId xmlns:a16="http://schemas.microsoft.com/office/drawing/2014/main" id="{D5A6BC5D-0283-4836-A3D7-43DD318206AC}"/>
               </a:ext>
             </a:extLst>
           </p:cNvPr>
@@ -11869,7 +11877,7 @@
           <p:cNvPr id="2" name="">
             <a:extLst xmlns:a="http://schemas.openxmlformats.org/drawingml/2006/main">
               <a:ext uri="{FF2B5EF4-FFF2-40B4-BE49-F238E27FC236}">
-                <a16:creationId xmlns:a16="http://schemas.microsoft.com/office/drawing/2014/main" id="{4A49B4BE-1CC4-42BB-ABF9-465F096505C3}"/>
+                <a16:creationId xmlns:a16="http://schemas.microsoft.com/office/drawing/2014/main" id="{22AAFD44-975F-4F3E-ABCC-A0F758A12E91}"/>
               </a:ext>
             </a:extLst>
           </p:cNvPr>
@@ -11926,7 +11934,7 @@
           <p:cNvPr id="3" name="">
             <a:extLst xmlns:a="http://schemas.openxmlformats.org/drawingml/2006/main">
               <a:ext uri="{FF2B5EF4-FFF2-40B4-BE49-F238E27FC236}">
-                <a16:creationId xmlns:a16="http://schemas.microsoft.com/office/drawing/2014/main" id="{82C2A172-7129-49A8-86BC-7D06872C8630}"/>
+                <a16:creationId xmlns:a16="http://schemas.microsoft.com/office/drawing/2014/main" id="{AB4EE42A-4D13-40F5-BB97-3D730B5835FE}"/>
               </a:ext>
             </a:extLst>
           </p:cNvPr>
@@ -11958,7 +11966,7 @@
           <p:cNvPr id="4" name="">
             <a:extLst xmlns:a="http://schemas.openxmlformats.org/drawingml/2006/main">
               <a:ext uri="{FF2B5EF4-FFF2-40B4-BE49-F238E27FC236}">
-                <a16:creationId xmlns:a16="http://schemas.microsoft.com/office/drawing/2014/main" id="{5BDB0E11-EE19-4B08-90B4-FBF2BB2F5796}"/>
+                <a16:creationId xmlns:a16="http://schemas.microsoft.com/office/drawing/2014/main" id="{31086B1C-7F90-4E9D-BE60-5EE513B3CDF5}"/>
               </a:ext>
             </a:extLst>
           </p:cNvPr>
@@ -12015,7 +12023,7 @@
           <p:cNvPr id="5" name="">
             <a:extLst xmlns:a="http://schemas.openxmlformats.org/drawingml/2006/main">
               <a:ext uri="{FF2B5EF4-FFF2-40B4-BE49-F238E27FC236}">
-                <a16:creationId xmlns:a16="http://schemas.microsoft.com/office/drawing/2014/main" id="{DFED3B01-2E80-4946-9054-14FC626F3A8C}"/>
+                <a16:creationId xmlns:a16="http://schemas.microsoft.com/office/drawing/2014/main" id="{DA778849-8320-4535-A663-9671E7E939DD}"/>
               </a:ext>
             </a:extLst>
           </p:cNvPr>
@@ -12072,7 +12080,7 @@
           <p:cNvPr id="6" name="">
             <a:extLst xmlns:a="http://schemas.openxmlformats.org/drawingml/2006/main">
               <a:ext uri="{FF2B5EF4-FFF2-40B4-BE49-F238E27FC236}">
-                <a16:creationId xmlns:a16="http://schemas.microsoft.com/office/drawing/2014/main" id="{CA594496-B163-4517-B8D5-6CCB696E796A}"/>
+                <a16:creationId xmlns:a16="http://schemas.microsoft.com/office/drawing/2014/main" id="{159A554C-E79E-49F0-A423-2DA0C061DF3F}"/>
               </a:ext>
             </a:extLst>
           </p:cNvPr>
@@ -12129,7 +12137,7 @@
           <p:cNvPr id="7" name="">
             <a:extLst xmlns:a="http://schemas.openxmlformats.org/drawingml/2006/main">
               <a:ext uri="{FF2B5EF4-FFF2-40B4-BE49-F238E27FC236}">
-                <a16:creationId xmlns:a16="http://schemas.microsoft.com/office/drawing/2014/main" id="{9DAAEE7A-712B-4868-A502-ED303109D13D}"/>
+                <a16:creationId xmlns:a16="http://schemas.microsoft.com/office/drawing/2014/main" id="{A8EA1222-B8D2-4612-8053-C97424ABDF1F}"/>
               </a:ext>
             </a:extLst>
           </p:cNvPr>
@@ -12161,7 +12169,7 @@
           <p:cNvPr id="8" name="">
             <a:extLst xmlns:a="http://schemas.openxmlformats.org/drawingml/2006/main">
               <a:ext uri="{FF2B5EF4-FFF2-40B4-BE49-F238E27FC236}">
-                <a16:creationId xmlns:a16="http://schemas.microsoft.com/office/drawing/2014/main" id="{8890C243-2622-4335-8C94-33E0E3D849D6}"/>
+                <a16:creationId xmlns:a16="http://schemas.microsoft.com/office/drawing/2014/main" id="{1DEE28D6-CDE2-4B19-BF03-70BAED6071A2}"/>
               </a:ext>
             </a:extLst>
           </p:cNvPr>
@@ -12218,7 +12226,7 @@
           <p:cNvPr id="9" name="">
             <a:extLst xmlns:a="http://schemas.openxmlformats.org/drawingml/2006/main">
               <a:ext uri="{FF2B5EF4-FFF2-40B4-BE49-F238E27FC236}">
-                <a16:creationId xmlns:a16="http://schemas.microsoft.com/office/drawing/2014/main" id="{3E457C6E-1C04-46EA-8355-F46D530551BD}"/>
+                <a16:creationId xmlns:a16="http://schemas.microsoft.com/office/drawing/2014/main" id="{2C06A135-02FD-4962-BCEA-858ABBADA9B3}"/>
               </a:ext>
             </a:extLst>
           </p:cNvPr>
@@ -12275,7 +12283,7 @@
           <p:cNvPr id="10" name="">
             <a:extLst xmlns:a="http://schemas.openxmlformats.org/drawingml/2006/main">
               <a:ext uri="{FF2B5EF4-FFF2-40B4-BE49-F238E27FC236}">
-                <a16:creationId xmlns:a16="http://schemas.microsoft.com/office/drawing/2014/main" id="{2CC9281D-77DC-4160-A4DB-91402EDB4052}"/>
+                <a16:creationId xmlns:a16="http://schemas.microsoft.com/office/drawing/2014/main" id="{CF96CD45-4A2D-4F6F-B4C8-9E8F1965E505}"/>
               </a:ext>
             </a:extLst>
           </p:cNvPr>
@@ -12309,7 +12317,7 @@
           <p:cNvPr id="11" name="">
             <a:extLst xmlns:a="http://schemas.openxmlformats.org/drawingml/2006/main">
               <a:ext uri="{FF2B5EF4-FFF2-40B4-BE49-F238E27FC236}">
-                <a16:creationId xmlns:a16="http://schemas.microsoft.com/office/drawing/2014/main" id="{845DDF38-5486-4EA0-A35D-77058CB93C5B}"/>
+                <a16:creationId xmlns:a16="http://schemas.microsoft.com/office/drawing/2014/main" id="{387613A5-2774-4BFF-9792-C826C118E881}"/>
               </a:ext>
             </a:extLst>
           </p:cNvPr>
@@ -12341,7 +12349,7 @@
           <p:cNvPr id="12" name="">
             <a:extLst xmlns:a="http://schemas.openxmlformats.org/drawingml/2006/main">
               <a:ext uri="{FF2B5EF4-FFF2-40B4-BE49-F238E27FC236}">
-                <a16:creationId xmlns:a16="http://schemas.microsoft.com/office/drawing/2014/main" id="{EF77CE1C-A07E-4847-9949-755627FF51B7}"/>
+                <a16:creationId xmlns:a16="http://schemas.microsoft.com/office/drawing/2014/main" id="{3E59A389-62F6-4655-902E-2A2F11E982DD}"/>
               </a:ext>
             </a:extLst>
           </p:cNvPr>
@@ -12398,7 +12406,7 @@
           <p:cNvPr id="13" name="">
             <a:extLst xmlns:a="http://schemas.openxmlformats.org/drawingml/2006/main">
               <a:ext uri="{FF2B5EF4-FFF2-40B4-BE49-F238E27FC236}">
-                <a16:creationId xmlns:a16="http://schemas.microsoft.com/office/drawing/2014/main" id="{D266BD4F-B00A-495F-A75D-A32560082DB0}"/>
+                <a16:creationId xmlns:a16="http://schemas.microsoft.com/office/drawing/2014/main" id="{313E2756-E391-4388-8B9A-34FCDA940C29}"/>
               </a:ext>
             </a:extLst>
           </p:cNvPr>
@@ -12455,7 +12463,7 @@
           <p:cNvPr id="14" name="">
             <a:extLst xmlns:a="http://schemas.openxmlformats.org/drawingml/2006/main">
               <a:ext uri="{FF2B5EF4-FFF2-40B4-BE49-F238E27FC236}">
-                <a16:creationId xmlns:a16="http://schemas.microsoft.com/office/drawing/2014/main" id="{AB57040E-BDDF-4B28-82CE-877F667454C3}"/>
+                <a16:creationId xmlns:a16="http://schemas.microsoft.com/office/drawing/2014/main" id="{31FC6A82-4529-4548-B7E9-116B7AF23229}"/>
               </a:ext>
             </a:extLst>
           </p:cNvPr>
@@ -12489,7 +12497,7 @@
           <p:cNvPr id="15" name="">
             <a:extLst xmlns:a="http://schemas.openxmlformats.org/drawingml/2006/main">
               <a:ext uri="{FF2B5EF4-FFF2-40B4-BE49-F238E27FC236}">
-                <a16:creationId xmlns:a16="http://schemas.microsoft.com/office/drawing/2014/main" id="{1C164C7F-C344-42EB-88AE-6E250A50E30F}"/>
+                <a16:creationId xmlns:a16="http://schemas.microsoft.com/office/drawing/2014/main" id="{4A996B82-0557-4CFF-9797-61E835BF2EA3}"/>
               </a:ext>
             </a:extLst>
           </p:cNvPr>
@@ -12521,7 +12529,7 @@
           <p:cNvPr id="16" name="">
             <a:extLst xmlns:a="http://schemas.openxmlformats.org/drawingml/2006/main">
               <a:ext uri="{FF2B5EF4-FFF2-40B4-BE49-F238E27FC236}">
-                <a16:creationId xmlns:a16="http://schemas.microsoft.com/office/drawing/2014/main" id="{7FDF2D7C-5601-4E9B-96E9-957D51B6C986}"/>
+                <a16:creationId xmlns:a16="http://schemas.microsoft.com/office/drawing/2014/main" id="{4AC97E60-2411-4EA8-80CE-16A02AC653D0}"/>
               </a:ext>
             </a:extLst>
           </p:cNvPr>
@@ -12578,7 +12586,7 @@
           <p:cNvPr id="17" name="">
             <a:extLst xmlns:a="http://schemas.openxmlformats.org/drawingml/2006/main">
               <a:ext uri="{FF2B5EF4-FFF2-40B4-BE49-F238E27FC236}">
-                <a16:creationId xmlns:a16="http://schemas.microsoft.com/office/drawing/2014/main" id="{6A3F09C3-543E-405C-8966-2D847914CCEB}"/>
+                <a16:creationId xmlns:a16="http://schemas.microsoft.com/office/drawing/2014/main" id="{9760A457-6628-4CCC-BA92-D6C5AC8EDD48}"/>
               </a:ext>
             </a:extLst>
           </p:cNvPr>
@@ -12635,7 +12643,7 @@
           <p:cNvPr id="18" name="">
             <a:extLst xmlns:a="http://schemas.openxmlformats.org/drawingml/2006/main">
               <a:ext uri="{FF2B5EF4-FFF2-40B4-BE49-F238E27FC236}">
-                <a16:creationId xmlns:a16="http://schemas.microsoft.com/office/drawing/2014/main" id="{128F81FB-1843-4D01-A252-0D3534C28460}"/>
+                <a16:creationId xmlns:a16="http://schemas.microsoft.com/office/drawing/2014/main" id="{86FC44AB-417C-4B59-AFDF-9C568EFEDCCA}"/>
               </a:ext>
             </a:extLst>
           </p:cNvPr>
@@ -12669,7 +12677,7 @@
           <p:cNvPr id="19" name="">
             <a:extLst xmlns:a="http://schemas.openxmlformats.org/drawingml/2006/main">
               <a:ext uri="{FF2B5EF4-FFF2-40B4-BE49-F238E27FC236}">
-                <a16:creationId xmlns:a16="http://schemas.microsoft.com/office/drawing/2014/main" id="{06684064-6363-427B-ABA0-326553311921}"/>
+                <a16:creationId xmlns:a16="http://schemas.microsoft.com/office/drawing/2014/main" id="{49F29F1C-8F0A-4D40-908C-6EE40C0CE362}"/>
               </a:ext>
             </a:extLst>
           </p:cNvPr>
@@ -12701,7 +12709,7 @@
           <p:cNvPr id="20" name="">
             <a:extLst xmlns:a="http://schemas.openxmlformats.org/drawingml/2006/main">
               <a:ext uri="{FF2B5EF4-FFF2-40B4-BE49-F238E27FC236}">
-                <a16:creationId xmlns:a16="http://schemas.microsoft.com/office/drawing/2014/main" id="{673B570F-3149-4F71-9DB0-EC79A449D27D}"/>
+                <a16:creationId xmlns:a16="http://schemas.microsoft.com/office/drawing/2014/main" id="{47737D3C-B15C-437D-AC2E-D94309200CFB}"/>
               </a:ext>
             </a:extLst>
           </p:cNvPr>
@@ -12758,7 +12766,7 @@
           <p:cNvPr id="21" name="">
             <a:extLst xmlns:a="http://schemas.openxmlformats.org/drawingml/2006/main">
               <a:ext uri="{FF2B5EF4-FFF2-40B4-BE49-F238E27FC236}">
-                <a16:creationId xmlns:a16="http://schemas.microsoft.com/office/drawing/2014/main" id="{FD0AE63A-CF1E-460A-BC57-75A932FA975B}"/>
+                <a16:creationId xmlns:a16="http://schemas.microsoft.com/office/drawing/2014/main" id="{6D7F6534-B791-4F58-970E-6DF7D0D4531D}"/>
               </a:ext>
             </a:extLst>
           </p:cNvPr>
@@ -12815,7 +12823,7 @@
           <p:cNvPr id="22" name="">
             <a:extLst xmlns:a="http://schemas.openxmlformats.org/drawingml/2006/main">
               <a:ext uri="{FF2B5EF4-FFF2-40B4-BE49-F238E27FC236}">
-                <a16:creationId xmlns:a16="http://schemas.microsoft.com/office/drawing/2014/main" id="{45AECFAE-9638-42E6-8977-26BAF3B6E92A}"/>
+                <a16:creationId xmlns:a16="http://schemas.microsoft.com/office/drawing/2014/main" id="{3B11B485-A4A6-41C7-B358-90D48CEE3B36}"/>
               </a:ext>
             </a:extLst>
           </p:cNvPr>
@@ -12870,7 +12878,7 @@
     </p:spTree>
     <p:extLst>
       <p:ext uri="{BB962C8B-B14F-4D97-AF65-F5344CB8AC3E}">
-        <p14:creationId xmlns:p14="http://schemas.microsoft.com/office/powerpoint/2010/main" val="174877050"/>
+        <p14:creationId xmlns:p14="http://schemas.microsoft.com/office/powerpoint/2010/main" val="1231911407"/>
       </p:ext>
     </p:extLst>
   </p:cSld>
@@ -13071,7 +13079,7 @@
           <p:cNvPr id="22" name="">
             <a:extLst xmlns:a="http://schemas.openxmlformats.org/drawingml/2006/main">
               <a:ext uri="{FF2B5EF4-FFF2-40B4-BE49-F238E27FC236}">
-                <a16:creationId xmlns:a16="http://schemas.microsoft.com/office/drawing/2014/main" id="{1730085F-8CB9-4F20-B8AA-B92E2178D4C6}"/>
+                <a16:creationId xmlns:a16="http://schemas.microsoft.com/office/drawing/2014/main" id="{AA41AF7C-86E4-439A-AAD3-C1041E76E9E9}"/>
               </a:ext>
             </a:extLst>
           </p:cNvPr>
@@ -13103,7 +13111,7 @@
           <p:cNvPr id="2" name="">
             <a:extLst xmlns:a="http://schemas.openxmlformats.org/drawingml/2006/main">
               <a:ext uri="{FF2B5EF4-FFF2-40B4-BE49-F238E27FC236}">
-                <a16:creationId xmlns:a16="http://schemas.microsoft.com/office/drawing/2014/main" id="{6552D839-2E2B-4B75-80FA-A1BA8B461CAA}"/>
+                <a16:creationId xmlns:a16="http://schemas.microsoft.com/office/drawing/2014/main" id="{6E24A438-3117-4650-9A09-D01D21775D56}"/>
               </a:ext>
             </a:extLst>
           </p:cNvPr>
@@ -13160,7 +13168,7 @@
           <p:cNvPr id="3" name="">
             <a:extLst xmlns:a="http://schemas.openxmlformats.org/drawingml/2006/main">
               <a:ext uri="{FF2B5EF4-FFF2-40B4-BE49-F238E27FC236}">
-                <a16:creationId xmlns:a16="http://schemas.microsoft.com/office/drawing/2014/main" id="{C262CBE1-C03C-4D5D-9888-9B95A8E29572}"/>
+                <a16:creationId xmlns:a16="http://schemas.microsoft.com/office/drawing/2014/main" id="{43E15B36-9E06-4643-84B5-6F552DBCE4AD}"/>
               </a:ext>
             </a:extLst>
           </p:cNvPr>
@@ -13192,7 +13200,7 @@
           <p:cNvPr id="4" name="">
             <a:extLst xmlns:a="http://schemas.openxmlformats.org/drawingml/2006/main">
               <a:ext uri="{FF2B5EF4-FFF2-40B4-BE49-F238E27FC236}">
-                <a16:creationId xmlns:a16="http://schemas.microsoft.com/office/drawing/2014/main" id="{8F49381F-BE20-46C0-95BF-6ECF4226B3F6}"/>
+                <a16:creationId xmlns:a16="http://schemas.microsoft.com/office/drawing/2014/main" id="{CCDFE6BA-738B-40EA-845F-F3312A84DEC6}"/>
               </a:ext>
             </a:extLst>
           </p:cNvPr>
@@ -13249,7 +13257,7 @@
           <p:cNvPr id="5" name="">
             <a:extLst xmlns:a="http://schemas.openxmlformats.org/drawingml/2006/main">
               <a:ext uri="{FF2B5EF4-FFF2-40B4-BE49-F238E27FC236}">
-                <a16:creationId xmlns:a16="http://schemas.microsoft.com/office/drawing/2014/main" id="{3C40F7D2-FBBC-4779-A2DB-E4EEF64D4CF8}"/>
+                <a16:creationId xmlns:a16="http://schemas.microsoft.com/office/drawing/2014/main" id="{214DBBD2-8BB6-4E2A-84E3-8DD21C3F7253}"/>
               </a:ext>
             </a:extLst>
           </p:cNvPr>
@@ -13306,7 +13314,7 @@
           <p:cNvPr id="6" name="">
             <a:extLst xmlns:a="http://schemas.openxmlformats.org/drawingml/2006/main">
               <a:ext uri="{FF2B5EF4-FFF2-40B4-BE49-F238E27FC236}">
-                <a16:creationId xmlns:a16="http://schemas.microsoft.com/office/drawing/2014/main" id="{6226F8C7-E544-4A10-ACF7-4560A5BF6A09}"/>
+                <a16:creationId xmlns:a16="http://schemas.microsoft.com/office/drawing/2014/main" id="{E6823DE4-3AAC-4AC4-A61B-0C3506E52903}"/>
               </a:ext>
             </a:extLst>
           </p:cNvPr>
@@ -13363,7 +13371,7 @@
           <p:cNvPr id="7" name="">
             <a:extLst xmlns:a="http://schemas.openxmlformats.org/drawingml/2006/main">
               <a:ext uri="{FF2B5EF4-FFF2-40B4-BE49-F238E27FC236}">
-                <a16:creationId xmlns:a16="http://schemas.microsoft.com/office/drawing/2014/main" id="{26D12870-0F4C-47D1-8E31-8724F3358EB1}"/>
+                <a16:creationId xmlns:a16="http://schemas.microsoft.com/office/drawing/2014/main" id="{114342F0-63D6-4A71-9196-B01DC519670B}"/>
               </a:ext>
             </a:extLst>
           </p:cNvPr>
@@ -13395,7 +13403,7 @@
           <p:cNvPr id="8" name="">
             <a:extLst xmlns:a="http://schemas.openxmlformats.org/drawingml/2006/main">
               <a:ext uri="{FF2B5EF4-FFF2-40B4-BE49-F238E27FC236}">
-                <a16:creationId xmlns:a16="http://schemas.microsoft.com/office/drawing/2014/main" id="{56E72C2C-B6B4-4596-BD0A-B9F8079E7BF7}"/>
+                <a16:creationId xmlns:a16="http://schemas.microsoft.com/office/drawing/2014/main" id="{3C199366-7599-41C5-A62C-48C93C075160}"/>
               </a:ext>
             </a:extLst>
           </p:cNvPr>
@@ -13452,7 +13460,7 @@
           <p:cNvPr id="9" name="">
             <a:extLst xmlns:a="http://schemas.openxmlformats.org/drawingml/2006/main">
               <a:ext uri="{FF2B5EF4-FFF2-40B4-BE49-F238E27FC236}">
-                <a16:creationId xmlns:a16="http://schemas.microsoft.com/office/drawing/2014/main" id="{FB2F5AB8-48B5-41EB-A712-994DA7B14405}"/>
+                <a16:creationId xmlns:a16="http://schemas.microsoft.com/office/drawing/2014/main" id="{EEDDA490-18B2-480F-BCC3-4746DCF95A7F}"/>
               </a:ext>
             </a:extLst>
           </p:cNvPr>
@@ -13509,7 +13517,7 @@
           <p:cNvPr id="10" name="">
             <a:extLst xmlns:a="http://schemas.openxmlformats.org/drawingml/2006/main">
               <a:ext uri="{FF2B5EF4-FFF2-40B4-BE49-F238E27FC236}">
-                <a16:creationId xmlns:a16="http://schemas.microsoft.com/office/drawing/2014/main" id="{176D86D3-F376-4484-AD35-38EBE492A6C1}"/>
+                <a16:creationId xmlns:a16="http://schemas.microsoft.com/office/drawing/2014/main" id="{86F2D208-F5A2-419B-ADA2-9EFB19D4623B}"/>
               </a:ext>
             </a:extLst>
           </p:cNvPr>
@@ -13543,7 +13551,7 @@
           <p:cNvPr id="11" name="">
             <a:extLst xmlns:a="http://schemas.openxmlformats.org/drawingml/2006/main">
               <a:ext uri="{FF2B5EF4-FFF2-40B4-BE49-F238E27FC236}">
-                <a16:creationId xmlns:a16="http://schemas.microsoft.com/office/drawing/2014/main" id="{E8C1DDEB-B60B-4BE5-9B51-E402374C5C6F}"/>
+                <a16:creationId xmlns:a16="http://schemas.microsoft.com/office/drawing/2014/main" id="{B183B4AE-EB47-4497-ABCA-11664D0BEE2F}"/>
               </a:ext>
             </a:extLst>
           </p:cNvPr>
@@ -13575,7 +13583,7 @@
           <p:cNvPr id="12" name="">
             <a:extLst xmlns:a="http://schemas.openxmlformats.org/drawingml/2006/main">
               <a:ext uri="{FF2B5EF4-FFF2-40B4-BE49-F238E27FC236}">
-                <a16:creationId xmlns:a16="http://schemas.microsoft.com/office/drawing/2014/main" id="{718F683D-E64F-40B5-A873-D0A97CF4816F}"/>
+                <a16:creationId xmlns:a16="http://schemas.microsoft.com/office/drawing/2014/main" id="{66C6222A-0938-4F71-940E-29CC5170270C}"/>
               </a:ext>
             </a:extLst>
           </p:cNvPr>
@@ -13632,7 +13640,7 @@
           <p:cNvPr id="13" name="">
             <a:extLst xmlns:a="http://schemas.openxmlformats.org/drawingml/2006/main">
               <a:ext uri="{FF2B5EF4-FFF2-40B4-BE49-F238E27FC236}">
-                <a16:creationId xmlns:a16="http://schemas.microsoft.com/office/drawing/2014/main" id="{5CCFB4DB-0985-41EC-A531-9621F2C81915}"/>
+                <a16:creationId xmlns:a16="http://schemas.microsoft.com/office/drawing/2014/main" id="{A95FCC2B-8C6D-4E46-A62D-881107BBD377}"/>
               </a:ext>
             </a:extLst>
           </p:cNvPr>
@@ -13689,7 +13697,7 @@
           <p:cNvPr id="14" name="">
             <a:extLst xmlns:a="http://schemas.openxmlformats.org/drawingml/2006/main">
               <a:ext uri="{FF2B5EF4-FFF2-40B4-BE49-F238E27FC236}">
-                <a16:creationId xmlns:a16="http://schemas.microsoft.com/office/drawing/2014/main" id="{7AD1BBC4-6794-4077-8B82-AF9A5893490C}"/>
+                <a16:creationId xmlns:a16="http://schemas.microsoft.com/office/drawing/2014/main" id="{E6291CFA-8EFA-44F8-B7C4-B906BB8C2AFE}"/>
               </a:ext>
             </a:extLst>
           </p:cNvPr>
@@ -13723,7 +13731,7 @@
           <p:cNvPr id="15" name="">
             <a:extLst xmlns:a="http://schemas.openxmlformats.org/drawingml/2006/main">
               <a:ext uri="{FF2B5EF4-FFF2-40B4-BE49-F238E27FC236}">
-                <a16:creationId xmlns:a16="http://schemas.microsoft.com/office/drawing/2014/main" id="{485F08D9-C953-4F08-A053-8DA45A962497}"/>
+                <a16:creationId xmlns:a16="http://schemas.microsoft.com/office/drawing/2014/main" id="{5EF86F6C-63B1-4100-90FC-AC38FA98C801}"/>
               </a:ext>
             </a:extLst>
           </p:cNvPr>
@@ -13755,7 +13763,7 @@
           <p:cNvPr id="16" name="">
             <a:extLst xmlns:a="http://schemas.openxmlformats.org/drawingml/2006/main">
               <a:ext uri="{FF2B5EF4-FFF2-40B4-BE49-F238E27FC236}">
-                <a16:creationId xmlns:a16="http://schemas.microsoft.com/office/drawing/2014/main" id="{9FD0F814-5C7E-43A6-B2B7-D4C7BD396D5F}"/>
+                <a16:creationId xmlns:a16="http://schemas.microsoft.com/office/drawing/2014/main" id="{4428A7A3-FD5C-40E4-A3B2-9A7288C6FB53}"/>
               </a:ext>
             </a:extLst>
           </p:cNvPr>
@@ -13812,7 +13820,7 @@
           <p:cNvPr id="17" name="">
             <a:extLst xmlns:a="http://schemas.openxmlformats.org/drawingml/2006/main">
               <a:ext uri="{FF2B5EF4-FFF2-40B4-BE49-F238E27FC236}">
-                <a16:creationId xmlns:a16="http://schemas.microsoft.com/office/drawing/2014/main" id="{38224A81-E7E5-4155-8F47-EF3172AE5C47}"/>
+                <a16:creationId xmlns:a16="http://schemas.microsoft.com/office/drawing/2014/main" id="{30FCDF3A-4614-40BE-8CF3-D15AD78D19CF}"/>
               </a:ext>
             </a:extLst>
           </p:cNvPr>
@@ -13869,7 +13877,7 @@
           <p:cNvPr id="18" name="">
             <a:extLst xmlns:a="http://schemas.openxmlformats.org/drawingml/2006/main">
               <a:ext uri="{FF2B5EF4-FFF2-40B4-BE49-F238E27FC236}">
-                <a16:creationId xmlns:a16="http://schemas.microsoft.com/office/drawing/2014/main" id="{9F7B8940-09F6-443D-8240-A7F5B2D7E0E1}"/>
+                <a16:creationId xmlns:a16="http://schemas.microsoft.com/office/drawing/2014/main" id="{C37D61B2-A18F-4D2F-9A3E-26B1DA08A47F}"/>
               </a:ext>
             </a:extLst>
           </p:cNvPr>
@@ -13903,7 +13911,7 @@
           <p:cNvPr id="19" name="">
             <a:extLst xmlns:a="http://schemas.openxmlformats.org/drawingml/2006/main">
               <a:ext uri="{FF2B5EF4-FFF2-40B4-BE49-F238E27FC236}">
-                <a16:creationId xmlns:a16="http://schemas.microsoft.com/office/drawing/2014/main" id="{0E55FB40-A8A2-4047-B023-9D4033E83D0F}"/>
+                <a16:creationId xmlns:a16="http://schemas.microsoft.com/office/drawing/2014/main" id="{C3C4954C-8CAA-4876-A99C-15D6C0EB7454}"/>
               </a:ext>
             </a:extLst>
           </p:cNvPr>
@@ -13935,7 +13943,7 @@
           <p:cNvPr id="20" name="">
             <a:extLst xmlns:a="http://schemas.openxmlformats.org/drawingml/2006/main">
               <a:ext uri="{FF2B5EF4-FFF2-40B4-BE49-F238E27FC236}">
-                <a16:creationId xmlns:a16="http://schemas.microsoft.com/office/drawing/2014/main" id="{BB286499-841B-4BA9-AB08-D5D760EDD562}"/>
+                <a16:creationId xmlns:a16="http://schemas.microsoft.com/office/drawing/2014/main" id="{703E8464-B57F-4595-885A-3F1731D1B5AC}"/>
               </a:ext>
             </a:extLst>
           </p:cNvPr>
@@ -13992,7 +14000,7 @@
           <p:cNvPr id="21" name="">
             <a:extLst xmlns:a="http://schemas.openxmlformats.org/drawingml/2006/main">
               <a:ext uri="{FF2B5EF4-FFF2-40B4-BE49-F238E27FC236}">
-                <a16:creationId xmlns:a16="http://schemas.microsoft.com/office/drawing/2014/main" id="{1882AC79-9970-42D0-8B65-61B2281AC299}"/>
+                <a16:creationId xmlns:a16="http://schemas.microsoft.com/office/drawing/2014/main" id="{EB3FB574-E43F-4C8D-8400-866AB6CADC0D}"/>
               </a:ext>
             </a:extLst>
           </p:cNvPr>
@@ -14047,7 +14055,7 @@
     </p:spTree>
     <p:extLst>
       <p:ext uri="{BB962C8B-B14F-4D97-AF65-F5344CB8AC3E}">
-        <p14:creationId xmlns:p14="http://schemas.microsoft.com/office/powerpoint/2010/main" val="715551381"/>
+        <p14:creationId xmlns:p14="http://schemas.microsoft.com/office/powerpoint/2010/main" val="1280269642"/>
       </p:ext>
     </p:extLst>
   </p:cSld>
